--- a/成功率专项.pptx
+++ b/成功率专项.pptx
@@ -110,7 +110,7 @@
   <p:extLst>
     <p:ext uri="{521415D9-36F7-43E2-AB2F-B90AF26B5E84}">
       <p14:sectionLst xmlns:p14="http://schemas.microsoft.com/office/powerpoint/2010/main">
-        <p14:section name="成功率专项" id="{84da1ab2-f49d-3cbb-aeca-f523cae63d5b}">
+        <p14:section name="成功率专项" id="{ea5be0a5-1a87-8418-72c4-9ab2dd00cd68}">
           <p14:sldIdLst>
             <p14:sldId id="256"/>
             <p14:sldId id="257"/>
@@ -858,8 +858,7 @@
           <a:p>
             <a:r>
               <a:rPr lang="en-US" dirty="0"/>
-              <a:t>在引导支付宝上，我们做了第二期的用低价产品引导用户使用支付宝支付。之前我们做过在抢票中用低价产品吸引用户使用支付宝的策略，但转换率较低，为了进一步降低非支付宝订单数，提高大盘抢票成功率，我们扩大了补贴范围，需求上线后，日均目标订单数约 10,916 单，转化订单数约 232 单。下一步我们准备（待补充）
-此外我们也在对一些并非强制只能走直付才能的场景进行支付宝改造，例如针对非黑名单用户限制召回后只能走支付宝出票，能够避免由于订单支付状态判定超时导致的票量损失，对于召回候补来说能够转化更多的订单为支付宝订单，后续能够直接代付出票。</a:t>
+              <a:t>在引导支付宝上，我们做了第二期的用低价产品引导用户使用支付宝支付。之前我们做过在抢票中用低价产品吸引用户使用支付宝的策略，但转换率较低，为了进一步降低非支付宝订单数，提高大盘抢票成功率，我们扩大了补贴范围，需求上线后，日均目标订单数约 10,916 单，转化订单数约 232 单。</a:t>
             </a:r>
             <a:endParaRPr lang="en-US" dirty="0"/>
           </a:p>
@@ -2811,7 +2810,7 @@
         <p:spPr>
           <a:xfrm>
             <a:off x="457200" y="1508760"/>
-            <a:ext cx="6766560" cy="502920"/>
+            <a:ext cx="4846320" cy="502920"/>
           </a:xfrm>
           <a:prstGeom prst="rect">
             <a:avLst/>
@@ -2836,7 +2835,7 @@
         <p:spPr>
           <a:xfrm>
             <a:off x="457200" y="1508760"/>
-            <a:ext cx="6766560" cy="502920"/>
+            <a:ext cx="4846320" cy="502920"/>
           </a:xfrm>
           <a:prstGeom prst="rect">
             <a:avLst/>
@@ -2872,7 +2871,7 @@
         <p:spPr>
           <a:xfrm>
             <a:off x="548640" y="2194560"/>
-            <a:ext cx="731520" cy="457200"/>
+            <a:ext cx="731520" cy="530352"/>
           </a:xfrm>
           <a:prstGeom prst="rect">
             <a:avLst/>
@@ -2908,7 +2907,7 @@
         <p:spPr>
           <a:xfrm>
             <a:off x="1325880" y="2194560"/>
-            <a:ext cx="2743200" cy="457200"/>
+            <a:ext cx="3931920" cy="530352"/>
           </a:xfrm>
           <a:prstGeom prst="rect">
             <a:avLst/>
@@ -2924,14 +2923,14 @@
               <a:buNone/>
             </a:pPr>
             <a:r>
-              <a:rPr lang="en-US" sz="1250" dirty="0">
+              <a:rPr lang="en-US" sz="1300" dirty="0">
                 <a:solidFill>
                   <a:srgbClr val="3D4757"/>
                 </a:solidFill>
               </a:rPr>
               <a:t>一期在抢票中用低价产品吸引用户使用支付宝，但转化率较低</a:t>
             </a:r>
-            <a:endParaRPr lang="en-US" sz="1250" dirty="0"/>
+            <a:endParaRPr lang="en-US" sz="1300" dirty="0"/>
           </a:p>
         </p:txBody>
       </p:sp>
@@ -2943,8 +2942,8 @@
         </p:nvSpPr>
         <p:spPr>
           <a:xfrm>
-            <a:off x="548640" y="2761488"/>
-            <a:ext cx="731520" cy="457200"/>
+            <a:off x="548640" y="2816352"/>
+            <a:ext cx="731520" cy="530352"/>
           </a:xfrm>
           <a:prstGeom prst="rect">
             <a:avLst/>
@@ -2979,8 +2978,8 @@
         </p:nvSpPr>
         <p:spPr>
           <a:xfrm>
-            <a:off x="1325880" y="2761488"/>
-            <a:ext cx="2743200" cy="457200"/>
+            <a:off x="1325880" y="2816352"/>
+            <a:ext cx="3931920" cy="530352"/>
           </a:xfrm>
           <a:prstGeom prst="rect">
             <a:avLst/>
@@ -2996,14 +2995,14 @@
               <a:buNone/>
             </a:pPr>
             <a:r>
-              <a:rPr lang="en-US" sz="1250" dirty="0">
+              <a:rPr lang="en-US" sz="1300" dirty="0">
                 <a:solidFill>
                   <a:srgbClr val="3D4757"/>
                 </a:solidFill>
               </a:rPr>
-              <a:t>扩大补贴范围，覆盖更多非支付宝订单</a:t>
-            </a:r>
-            <a:endParaRPr lang="en-US" sz="1250" dirty="0"/>
+              <a:t>扩大补贴范围：非支付宝订单可特惠升级托管，仅支持支付宝支付</a:t>
+            </a:r>
+            <a:endParaRPr lang="en-US" sz="1300" dirty="0"/>
           </a:p>
         </p:txBody>
       </p:sp>
@@ -3015,12 +3014,12 @@
         </p:nvSpPr>
         <p:spPr>
           <a:xfrm>
-            <a:off x="457200" y="3429000"/>
-            <a:ext cx="3703320" cy="1737360"/>
+            <a:off x="457200" y="3611880"/>
+            <a:ext cx="4846320" cy="2606040"/>
           </a:xfrm>
           <a:prstGeom prst="roundRect">
             <a:avLst>
-              <a:gd name="adj" fmla="val 4211"/>
+              <a:gd name="adj" fmla="val 2807"/>
             </a:avLst>
           </a:prstGeom>
           <a:solidFill>
@@ -3042,7 +3041,7 @@
         </p:nvSpPr>
         <p:spPr>
           <a:xfrm>
-            <a:off x="685800" y="3547872"/>
+            <a:off x="731520" y="3794760"/>
             <a:ext cx="2743200" cy="274320"/>
           </a:xfrm>
           <a:prstGeom prst="rect">
@@ -3078,8 +3077,8 @@
         </p:nvSpPr>
         <p:spPr>
           <a:xfrm>
-            <a:off x="685800" y="3977640"/>
-            <a:ext cx="1280160" cy="457200"/>
+            <a:off x="731520" y="4297680"/>
+            <a:ext cx="1463040" cy="640080"/>
           </a:xfrm>
           <a:prstGeom prst="rect">
             <a:avLst/>
@@ -3095,14 +3094,14 @@
               <a:buNone/>
             </a:pPr>
             <a:r>
-              <a:rPr lang="en-US" sz="1300" dirty="0">
+              <a:rPr lang="en-US" sz="1400" dirty="0">
                 <a:solidFill>
                   <a:srgbClr val="3D4757"/>
                 </a:solidFill>
               </a:rPr>
               <a:t>目标订单数</a:t>
             </a:r>
-            <a:endParaRPr lang="en-US" sz="1300" dirty="0"/>
+            <a:endParaRPr lang="en-US" sz="1400" dirty="0"/>
           </a:p>
         </p:txBody>
       </p:sp>
@@ -3114,8 +3113,8 @@
         </p:nvSpPr>
         <p:spPr>
           <a:xfrm>
-            <a:off x="1920240" y="3977640"/>
-            <a:ext cx="2103120" cy="457200"/>
+            <a:off x="2194560" y="4297680"/>
+            <a:ext cx="2926080" cy="640080"/>
           </a:xfrm>
           <a:prstGeom prst="rect">
             <a:avLst/>
@@ -3131,14 +3130,14 @@
               <a:buNone/>
             </a:pPr>
             <a:r>
-              <a:rPr lang="en-US" sz="2200" b="1" dirty="0">
+              <a:rPr lang="en-US" sz="2800" b="1" dirty="0">
                 <a:solidFill>
                   <a:srgbClr val="15315E"/>
                 </a:solidFill>
               </a:rPr>
               <a:t>约 10,916 单</a:t>
             </a:r>
-            <a:endParaRPr lang="en-US" sz="2200" dirty="0"/>
+            <a:endParaRPr lang="en-US" sz="2800" dirty="0"/>
           </a:p>
         </p:txBody>
       </p:sp>
@@ -3150,8 +3149,8 @@
         </p:nvSpPr>
         <p:spPr>
           <a:xfrm>
-            <a:off x="685800" y="4526280"/>
-            <a:ext cx="1280160" cy="457200"/>
+            <a:off x="731520" y="5120640"/>
+            <a:ext cx="1463040" cy="640080"/>
           </a:xfrm>
           <a:prstGeom prst="rect">
             <a:avLst/>
@@ -3167,14 +3166,14 @@
               <a:buNone/>
             </a:pPr>
             <a:r>
-              <a:rPr lang="en-US" sz="1300" dirty="0">
+              <a:rPr lang="en-US" sz="1400" dirty="0">
                 <a:solidFill>
                   <a:srgbClr val="3D4757"/>
                 </a:solidFill>
               </a:rPr>
               <a:t>转化订单数</a:t>
             </a:r>
-            <a:endParaRPr lang="en-US" sz="1300" dirty="0"/>
+            <a:endParaRPr lang="en-US" sz="1400" dirty="0"/>
           </a:p>
         </p:txBody>
       </p:sp>
@@ -3186,8 +3185,8 @@
         </p:nvSpPr>
         <p:spPr>
           <a:xfrm>
-            <a:off x="1920240" y="4526280"/>
-            <a:ext cx="2103120" cy="457200"/>
+            <a:off x="2194560" y="5120640"/>
+            <a:ext cx="2926080" cy="640080"/>
           </a:xfrm>
           <a:prstGeom prst="rect">
             <a:avLst/>
@@ -3203,100 +3202,63 @@
               <a:buNone/>
             </a:pPr>
             <a:r>
-              <a:rPr lang="en-US" sz="2200" b="1" dirty="0">
+              <a:rPr lang="en-US" sz="2800" b="1" dirty="0">
                 <a:solidFill>
                   <a:srgbClr val="287DFA"/>
                 </a:solidFill>
               </a:rPr>
               <a:t>约 232 单</a:t>
             </a:r>
-            <a:endParaRPr lang="en-US" sz="2200" dirty="0"/>
-          </a:p>
-        </p:txBody>
-      </p:sp>
-      <p:sp>
-        <p:nvSpPr>
-          <p:cNvPr id="16" name="l-shot-frame"/>
+            <a:endParaRPr lang="en-US" sz="2800" dirty="0"/>
+          </a:p>
+        </p:txBody>
+      </p:sp>
+      <p:pic>
+        <p:nvPicPr>
+          <p:cNvPr id="16" name="shot-0" descr="① 特惠浮窗：非支付宝订单特惠升级托管">    </p:cNvPr>
+          <p:cNvPicPr>
+            <a:picLocks noChangeAspect="1"/>
+          </p:cNvPicPr>
+          <p:nvPr/>
+        </p:nvPicPr>
+        <p:blipFill>
+          <a:blip r:embed="rId1"/>
+          <a:stretch>
+            <a:fillRect/>
+          </a:stretch>
+        </p:blipFill>
+        <p:spPr>
+          <a:xfrm>
+            <a:off x="5715000" y="1508760"/>
+            <a:ext cx="1691640" cy="3718475"/>
+          </a:xfrm>
+          <a:prstGeom prst="rect">
+            <a:avLst/>
+          </a:prstGeom>
+        </p:spPr>
+      </p:pic>
+      <p:sp>
+        <p:nvSpPr>
+          <p:cNvPr id="17" name="shot-frame-0"/>
           <p:cNvSpPr/>
           <p:nvPr/>
         </p:nvSpPr>
         <p:spPr>
           <a:xfrm>
-            <a:off x="4343400" y="2194560"/>
-            <a:ext cx="2880360" cy="2971800"/>
+            <a:off x="5715000" y="1508760"/>
+            <a:ext cx="1691640" cy="3718475"/>
           </a:xfrm>
           <a:prstGeom prst="rect">
             <a:avLst/>
           </a:prstGeom>
           <a:solidFill>
-            <a:srgbClr val="FAFBFD"/>
-          </a:solidFill>
-          <a:ln w="15875">
-            <a:solidFill>
-              <a:srgbClr val="A9B4C2"/>
-            </a:solidFill>
-            <a:prstDash val="dash"/>
-          </a:ln>
-        </p:spPr>
-      </p:sp>
-      <p:sp>
-        <p:nvSpPr>
-          <p:cNvPr id="17" name="l-shot-label"/>
-          <p:cNvSpPr txBox="1"/>
-          <p:nvPr/>
-        </p:nvSpPr>
-        <p:spPr>
-          <a:xfrm>
-            <a:off x="4480560" y="2194560"/>
-            <a:ext cx="2606040" cy="2971800"/>
-          </a:xfrm>
-          <a:prstGeom prst="rect">
-            <a:avLst/>
-          </a:prstGeom>
-          <a:noFill/>
-          <a:ln/>
-        </p:spPr>
-        <p:txBody>
-          <a:bodyPr wrap="square" lIns="0" tIns="0" rIns="0" bIns="0" rtlCol="0" anchor="ctr"/>
-          <a:lstStyle/>
-          <a:p>
-            <a:pPr algn="ctr" indent="0" marL="0">
-              <a:buNone/>
-            </a:pPr>
-            <a:r>
-              <a:rPr lang="en-US" sz="1200" dirty="0">
-                <a:solidFill>
-                  <a:srgbClr val="5B6B80"/>
-                </a:solidFill>
-              </a:rPr>
-              <a:t>待补充：二期活动页 / 收银台截图</a:t>
-            </a:r>
-            <a:endParaRPr lang="en-US" sz="1200" dirty="0"/>
-          </a:p>
-        </p:txBody>
-      </p:sp>
-      <p:sp>
-        <p:nvSpPr>
-          <p:cNvPr id="18" name="l-next-card"/>
-          <p:cNvSpPr/>
-          <p:nvPr/>
-        </p:nvSpPr>
-        <p:spPr>
-          <a:xfrm>
-            <a:off x="457200" y="5303520"/>
-            <a:ext cx="6766560" cy="914400"/>
-          </a:xfrm>
-          <a:prstGeom prst="roundRect">
-            <a:avLst>
-              <a:gd name="adj" fmla="val 8000"/>
-            </a:avLst>
-          </a:prstGeom>
-          <a:solidFill>
-            <a:srgbClr val="EEF4FF"/>
+            <a:srgbClr val="FFFFFF">
+              <a:alpha val="0"/>
+            </a:srgbClr>
           </a:solidFill>
           <a:ln w="12700">
             <a:solidFill>
-              <a:srgbClr val="EEF4FF"/>
+              <a:srgbClr val="D9DEE7"/>
             </a:solidFill>
             <a:prstDash val="solid"/>
           </a:ln>
@@ -3304,71 +3266,100 @@
       </p:sp>
       <p:sp>
         <p:nvSpPr>
-          <p:cNvPr id="19" name="l-next"/>
+          <p:cNvPr id="18" name="shot-cap-0"/>
           <p:cNvSpPr txBox="1"/>
           <p:nvPr/>
         </p:nvSpPr>
         <p:spPr>
           <a:xfrm>
-            <a:off x="685800" y="5303520"/>
-            <a:ext cx="6400800" cy="914400"/>
-          </a:xfrm>
-          <a:prstGeom prst="rect">
-            <a:avLst/>
-          </a:prstGeom>
-          <a:noFill/>
-          <a:ln/>
-        </p:spPr>
-        <p:txBody>
-          <a:bodyPr wrap="square" lIns="0" tIns="0" rIns="0" bIns="0" rtlCol="0" anchor="ctr"/>
-          <a:lstStyle/>
-          <a:p>
-            <a:pPr indent="0" marL="0">
-              <a:buNone/>
-            </a:pPr>
-            <a:r>
-              <a:rPr lang="en-US" sz="1400" b="1" dirty="0">
-                <a:solidFill>
-                  <a:srgbClr val="287DFA"/>
-                </a:solidFill>
-              </a:rPr>
-              <a:t>下一步：</a:t>
-            </a:r>
-            <a:pPr indent="0" marL="0">
-              <a:buNone/>
-            </a:pPr>
-            <a:r>
-              <a:rPr lang="en-US" sz="1400" dirty="0">
-                <a:solidFill>
-                  <a:srgbClr val="5B6B80"/>
-                </a:solidFill>
-              </a:rPr>
-              <a:t>待补充</a:t>
-            </a:r>
-            <a:endParaRPr lang="en-US" sz="1400" dirty="0"/>
-          </a:p>
-        </p:txBody>
-      </p:sp>
-      <p:sp>
-        <p:nvSpPr>
-          <p:cNvPr id="20" name="r-head-bg"/>
+            <a:off x="5623560" y="5318675"/>
+            <a:ext cx="1874520" cy="548640"/>
+          </a:xfrm>
+          <a:prstGeom prst="rect">
+            <a:avLst/>
+          </a:prstGeom>
+          <a:noFill/>
+          <a:ln/>
+        </p:spPr>
+        <p:txBody>
+          <a:bodyPr wrap="square" lIns="0" tIns="0" rIns="0" bIns="0" rtlCol="0" anchor="t"/>
+          <a:lstStyle/>
+          <a:p>
+            <a:pPr algn="ctr" indent="0" marL="0">
+              <a:buNone/>
+            </a:pPr>
+            <a:r>
+              <a:rPr lang="en-US" sz="1200" b="1" dirty="0">
+                <a:solidFill>
+                  <a:srgbClr val="15315E"/>
+                </a:solidFill>
+              </a:rPr>
+              <a:t>① 特惠浮窗</a:t>
+            </a:r>
+            <a:endParaRPr lang="en-US" sz="1200" dirty="0"/>
+          </a:p>
+          <a:p>
+            <a:pPr algn="ctr" indent="0" marL="0">
+              <a:buNone/>
+            </a:pPr>
+            <a:r>
+              <a:rPr lang="en-US" sz="1200" dirty="0">
+                <a:solidFill>
+                  <a:srgbClr val="3D4757"/>
+                </a:solidFill>
+              </a:rPr>
+              <a:t>非支付宝订单特惠升级托管</a:t>
+            </a:r>
+            <a:endParaRPr lang="en-US" sz="1200" dirty="0"/>
+          </a:p>
+        </p:txBody>
+      </p:sp>
+      <p:pic>
+        <p:nvPicPr>
+          <p:cNvPr id="19" name="shot-1" descr="② 托管等级页：展示限时特惠价">    </p:cNvPr>
+          <p:cNvPicPr>
+            <a:picLocks noChangeAspect="1"/>
+          </p:cNvPicPr>
+          <p:nvPr/>
+        </p:nvPicPr>
+        <p:blipFill>
+          <a:blip r:embed="rId2"/>
+          <a:stretch>
+            <a:fillRect/>
+          </a:stretch>
+        </p:blipFill>
+        <p:spPr>
+          <a:xfrm>
+            <a:off x="7772400" y="1508760"/>
+            <a:ext cx="1691640" cy="3718475"/>
+          </a:xfrm>
+          <a:prstGeom prst="rect">
+            <a:avLst/>
+          </a:prstGeom>
+        </p:spPr>
+      </p:pic>
+      <p:sp>
+        <p:nvSpPr>
+          <p:cNvPr id="20" name="shot-frame-1"/>
           <p:cNvSpPr/>
           <p:nvPr/>
         </p:nvSpPr>
         <p:spPr>
           <a:xfrm>
-            <a:off x="7498080" y="1508760"/>
-            <a:ext cx="4233672" cy="502920"/>
+            <a:off x="7772400" y="1508760"/>
+            <a:ext cx="1691640" cy="3718475"/>
           </a:xfrm>
           <a:prstGeom prst="rect">
             <a:avLst/>
           </a:prstGeom>
           <a:solidFill>
-            <a:srgbClr val="FF7A1A"/>
+            <a:srgbClr val="FFFFFF">
+              <a:alpha val="0"/>
+            </a:srgbClr>
           </a:solidFill>
           <a:ln w="12700">
             <a:solidFill>
-              <a:srgbClr val="FF7A1A"/>
+              <a:srgbClr val="D9DEE7"/>
             </a:solidFill>
             <a:prstDash val="solid"/>
           </a:ln>
@@ -3376,62 +3367,100 @@
       </p:sp>
       <p:sp>
         <p:nvSpPr>
-          <p:cNvPr id="21" name="r-head"/>
+          <p:cNvPr id="21" name="shot-cap-1"/>
           <p:cNvSpPr txBox="1"/>
           <p:nvPr/>
         </p:nvSpPr>
         <p:spPr>
           <a:xfrm>
-            <a:off x="7498080" y="1508760"/>
-            <a:ext cx="4233672" cy="502920"/>
-          </a:xfrm>
-          <a:prstGeom prst="rect">
-            <a:avLst/>
-          </a:prstGeom>
-          <a:noFill/>
-          <a:ln/>
-        </p:spPr>
-        <p:txBody>
-          <a:bodyPr wrap="square" lIns="0" tIns="0" rIns="0" bIns="0" rtlCol="0" anchor="ctr"/>
+            <a:off x="7680960" y="5318675"/>
+            <a:ext cx="1874520" cy="548640"/>
+          </a:xfrm>
+          <a:prstGeom prst="rect">
+            <a:avLst/>
+          </a:prstGeom>
+          <a:noFill/>
+          <a:ln/>
+        </p:spPr>
+        <p:txBody>
+          <a:bodyPr wrap="square" lIns="0" tIns="0" rIns="0" bIns="0" rtlCol="0" anchor="t"/>
           <a:lstStyle/>
           <a:p>
             <a:pPr algn="ctr" indent="0" marL="0">
               <a:buNone/>
             </a:pPr>
             <a:r>
-              <a:rPr lang="en-US" sz="1600" b="1" dirty="0">
-                <a:solidFill>
-                  <a:srgbClr val="FFFFFF"/>
-                </a:solidFill>
-              </a:rPr>
-              <a:t>推进中：召回场景限制只走支付宝</a:t>
-            </a:r>
-            <a:endParaRPr lang="en-US" sz="1600" dirty="0"/>
-          </a:p>
-        </p:txBody>
-      </p:sp>
-      <p:sp>
-        <p:nvSpPr>
-          <p:cNvPr id="22" name="r-card"/>
+              <a:rPr lang="en-US" sz="1200" b="1" dirty="0">
+                <a:solidFill>
+                  <a:srgbClr val="15315E"/>
+                </a:solidFill>
+              </a:rPr>
+              <a:t>② 托管等级页</a:t>
+            </a:r>
+            <a:endParaRPr lang="en-US" sz="1200" dirty="0"/>
+          </a:p>
+          <a:p>
+            <a:pPr algn="ctr" indent="0" marL="0">
+              <a:buNone/>
+            </a:pPr>
+            <a:r>
+              <a:rPr lang="en-US" sz="1200" dirty="0">
+                <a:solidFill>
+                  <a:srgbClr val="3D4757"/>
+                </a:solidFill>
+              </a:rPr>
+              <a:t>展示限时特惠价</a:t>
+            </a:r>
+            <a:endParaRPr lang="en-US" sz="1200" dirty="0"/>
+          </a:p>
+        </p:txBody>
+      </p:sp>
+      <p:pic>
+        <p:nvPicPr>
+          <p:cNvPr id="22" name="shot-2" descr="③ 收银台：仅保留支付宝支付">    </p:cNvPr>
+          <p:cNvPicPr>
+            <a:picLocks noChangeAspect="1"/>
+          </p:cNvPicPr>
+          <p:nvPr/>
+        </p:nvPicPr>
+        <p:blipFill>
+          <a:blip r:embed="rId3"/>
+          <a:stretch>
+            <a:fillRect/>
+          </a:stretch>
+        </p:blipFill>
+        <p:spPr>
+          <a:xfrm>
+            <a:off x="9829800" y="1508760"/>
+            <a:ext cx="1691640" cy="3718475"/>
+          </a:xfrm>
+          <a:prstGeom prst="rect">
+            <a:avLst/>
+          </a:prstGeom>
+        </p:spPr>
+      </p:pic>
+      <p:sp>
+        <p:nvSpPr>
+          <p:cNvPr id="23" name="shot-frame-2"/>
           <p:cNvSpPr/>
           <p:nvPr/>
         </p:nvSpPr>
         <p:spPr>
           <a:xfrm>
-            <a:off x="7498080" y="2194560"/>
-            <a:ext cx="4233672" cy="4023360"/>
-          </a:xfrm>
-          <a:prstGeom prst="roundRect">
-            <a:avLst>
-              <a:gd name="adj" fmla="val 1818"/>
-            </a:avLst>
+            <a:off x="9829800" y="1508760"/>
+            <a:ext cx="1691640" cy="3718475"/>
+          </a:xfrm>
+          <a:prstGeom prst="rect">
+            <a:avLst/>
           </a:prstGeom>
           <a:solidFill>
-            <a:srgbClr val="EEF4FF"/>
+            <a:srgbClr val="FFFFFF">
+              <a:alpha val="0"/>
+            </a:srgbClr>
           </a:solidFill>
           <a:ln w="12700">
             <a:solidFill>
-              <a:srgbClr val="EEF4FF"/>
+              <a:srgbClr val="D9DEE7"/>
             </a:solidFill>
             <a:prstDash val="solid"/>
           </a:ln>
@@ -3439,14 +3468,14 @@
       </p:sp>
       <p:sp>
         <p:nvSpPr>
-          <p:cNvPr id="23" name="r-k1"/>
+          <p:cNvPr id="24" name="shot-cap-2"/>
           <p:cNvSpPr txBox="1"/>
           <p:nvPr/>
         </p:nvSpPr>
         <p:spPr>
           <a:xfrm>
-            <a:off x="7726680" y="2377440"/>
-            <a:ext cx="3840480" cy="274320"/>
+            <a:off x="9738360" y="5318675"/>
+            <a:ext cx="1874520" cy="548640"/>
           </a:xfrm>
           <a:prstGeom prst="rect">
             <a:avLst/>
@@ -3458,207 +3487,30 @@
           <a:bodyPr wrap="square" lIns="0" tIns="0" rIns="0" bIns="0" rtlCol="0" anchor="t"/>
           <a:lstStyle/>
           <a:p>
-            <a:pPr indent="0" marL="0">
-              <a:buNone/>
-            </a:pPr>
-            <a:r>
-              <a:rPr lang="en-US" sz="1400" b="1" dirty="0">
+            <a:pPr algn="ctr" indent="0" marL="0">
+              <a:buNone/>
+            </a:pPr>
+            <a:r>
+              <a:rPr lang="en-US" sz="1200" b="1" dirty="0">
                 <a:solidFill>
                   <a:srgbClr val="15315E"/>
                 </a:solidFill>
               </a:rPr>
-              <a:t>对象</a:t>
-            </a:r>
-            <a:endParaRPr lang="en-US" sz="1400" dirty="0"/>
-          </a:p>
-        </p:txBody>
-      </p:sp>
-      <p:sp>
-        <p:nvSpPr>
-          <p:cNvPr id="24" name="r-v1"/>
-          <p:cNvSpPr txBox="1"/>
-          <p:nvPr/>
-        </p:nvSpPr>
-        <p:spPr>
-          <a:xfrm>
-            <a:off x="7726680" y="2697480"/>
-            <a:ext cx="3840480" cy="365760"/>
-          </a:xfrm>
-          <a:prstGeom prst="rect">
-            <a:avLst/>
-          </a:prstGeom>
-          <a:noFill/>
-          <a:ln/>
-        </p:spPr>
-        <p:txBody>
-          <a:bodyPr wrap="square" lIns="0" tIns="0" rIns="0" bIns="0" rtlCol="0" anchor="t"/>
-          <a:lstStyle/>
-          <a:p>
-            <a:pPr indent="0" marL="0">
-              <a:buNone/>
-            </a:pPr>
-            <a:r>
-              <a:rPr lang="en-US" sz="1300" dirty="0">
+              <a:t>③ 收银台</a:t>
+            </a:r>
+            <a:endParaRPr lang="en-US" sz="1200" dirty="0"/>
+          </a:p>
+          <a:p>
+            <a:pPr algn="ctr" indent="0" marL="0">
+              <a:buNone/>
+            </a:pPr>
+            <a:r>
+              <a:rPr lang="en-US" sz="1200" dirty="0">
                 <a:solidFill>
                   <a:srgbClr val="3D4757"/>
                 </a:solidFill>
               </a:rPr>
-              <a:t>非黑名单订单的召回场景</a:t>
-            </a:r>
-            <a:endParaRPr lang="en-US" sz="1300" dirty="0"/>
-          </a:p>
-        </p:txBody>
-      </p:sp>
-      <p:sp>
-        <p:nvSpPr>
-          <p:cNvPr id="25" name="r-k2"/>
-          <p:cNvSpPr txBox="1"/>
-          <p:nvPr/>
-        </p:nvSpPr>
-        <p:spPr>
-          <a:xfrm>
-            <a:off x="7726680" y="3246120"/>
-            <a:ext cx="3840480" cy="274320"/>
-          </a:xfrm>
-          <a:prstGeom prst="rect">
-            <a:avLst/>
-          </a:prstGeom>
-          <a:noFill/>
-          <a:ln/>
-        </p:spPr>
-        <p:txBody>
-          <a:bodyPr wrap="square" lIns="0" tIns="0" rIns="0" bIns="0" rtlCol="0" anchor="t"/>
-          <a:lstStyle/>
-          <a:p>
-            <a:pPr indent="0" marL="0">
-              <a:buNone/>
-            </a:pPr>
-            <a:r>
-              <a:rPr lang="en-US" sz="1400" b="1" dirty="0">
-                <a:solidFill>
-                  <a:srgbClr val="15315E"/>
-                </a:solidFill>
-              </a:rPr>
-              <a:t>价值</a:t>
-            </a:r>
-            <a:endParaRPr lang="en-US" sz="1400" dirty="0"/>
-          </a:p>
-        </p:txBody>
-      </p:sp>
-      <p:sp>
-        <p:nvSpPr>
-          <p:cNvPr id="26" name="r-v2"/>
-          <p:cNvSpPr txBox="1"/>
-          <p:nvPr/>
-        </p:nvSpPr>
-        <p:spPr>
-          <a:xfrm>
-            <a:off x="7726680" y="3566160"/>
-            <a:ext cx="3840480" cy="1463040"/>
-          </a:xfrm>
-          <a:prstGeom prst="rect">
-            <a:avLst/>
-          </a:prstGeom>
-          <a:noFill/>
-          <a:ln/>
-        </p:spPr>
-        <p:txBody>
-          <a:bodyPr wrap="square" lIns="0" tIns="0" rIns="0" bIns="0" rtlCol="0" anchor="t"/>
-          <a:lstStyle/>
-          <a:p>
-            <a:pPr marL="342900" indent="-342900">
-              <a:spcAft>
-                <a:spcPts val="600"/>
-              </a:spcAft>
-              <a:buSzPct val="100000"/>
-              <a:buChar char="•"/>
-            </a:pPr>
-            <a:r>
-              <a:rPr lang="en-US" sz="1300" dirty="0">
-                <a:solidFill>
-                  <a:srgbClr val="3D4757"/>
-                </a:solidFill>
-              </a:rPr>
-              <a:t>避免因订单支付状态判定超时导致的票量损失</a:t>
-            </a:r>
-            <a:endParaRPr lang="en-US" sz="1300" dirty="0"/>
-          </a:p>
-          <a:p>
-            <a:pPr marL="342900" indent="-342900">
-              <a:spcAft>
-                <a:spcPts val="600"/>
-              </a:spcAft>
-              <a:buSzPct val="100000"/>
-              <a:buChar char="•"/>
-            </a:pPr>
-            <a:r>
-              <a:rPr lang="en-US" sz="1300" dirty="0">
-                <a:solidFill>
-                  <a:srgbClr val="3D4757"/>
-                </a:solidFill>
-              </a:rPr>
-              <a:t>召回候补时把更多订单转化为支付宝订单，后续扣位可直接代付出票</a:t>
-            </a:r>
-            <a:endParaRPr lang="en-US" sz="1300" dirty="0"/>
-          </a:p>
-        </p:txBody>
-      </p:sp>
-      <p:sp>
-        <p:nvSpPr>
-          <p:cNvPr id="27" name="r-shot-frame"/>
-          <p:cNvSpPr/>
-          <p:nvPr/>
-        </p:nvSpPr>
-        <p:spPr>
-          <a:xfrm>
-            <a:off x="7726680" y="5120640"/>
-            <a:ext cx="3776472" cy="914400"/>
-          </a:xfrm>
-          <a:prstGeom prst="rect">
-            <a:avLst/>
-          </a:prstGeom>
-          <a:solidFill>
-            <a:srgbClr val="FAFBFD"/>
-          </a:solidFill>
-          <a:ln w="15875">
-            <a:solidFill>
-              <a:srgbClr val="A9B4C2"/>
-            </a:solidFill>
-            <a:prstDash val="dash"/>
-          </a:ln>
-        </p:spPr>
-      </p:sp>
-      <p:sp>
-        <p:nvSpPr>
-          <p:cNvPr id="28" name="r-shot-label"/>
-          <p:cNvSpPr txBox="1"/>
-          <p:nvPr/>
-        </p:nvSpPr>
-        <p:spPr>
-          <a:xfrm>
-            <a:off x="7863840" y="5120640"/>
-            <a:ext cx="3502152" cy="914400"/>
-          </a:xfrm>
-          <a:prstGeom prst="rect">
-            <a:avLst/>
-          </a:prstGeom>
-          <a:noFill/>
-          <a:ln/>
-        </p:spPr>
-        <p:txBody>
-          <a:bodyPr wrap="square" lIns="0" tIns="0" rIns="0" bIns="0" rtlCol="0" anchor="ctr"/>
-          <a:lstStyle/>
-          <a:p>
-            <a:pPr algn="ctr" indent="0" marL="0">
-              <a:buNone/>
-            </a:pPr>
-            <a:r>
-              <a:rPr lang="en-US" sz="1200" dirty="0">
-                <a:solidFill>
-                  <a:srgbClr val="5B6B80"/>
-                </a:solidFill>
-              </a:rPr>
-              <a:t>待补充：召回页面示意</a:t>
+              <a:t>仅保留支付宝支付</a:t>
             </a:r>
             <a:endParaRPr lang="en-US" sz="1200" dirty="0"/>
           </a:p>
@@ -4347,70 +4199,211 @@
           </a:p>
         </p:txBody>
       </p:sp>
-      <p:sp>
-        <p:nvSpPr>
-          <p:cNvPr id="20" name="flow-shot-frame"/>
+      <p:pic>
+        <p:nvPicPr>
+          <p:cNvPr id="20" name="flow-shot-0" descr="智能第二程：车票待确认页，用户确认出票后走直付">    </p:cNvPr>
+          <p:cNvPicPr>
+            <a:picLocks noChangeAspect="1"/>
+          </p:cNvPicPr>
+          <p:nvPr/>
+        </p:nvPicPr>
+        <p:blipFill>
+          <a:blip r:embed="rId1"/>
+          <a:stretch>
+            <a:fillRect/>
+          </a:stretch>
+        </p:blipFill>
+        <p:spPr>
+          <a:xfrm>
+            <a:off x="6309360" y="1508760"/>
+            <a:ext cx="1372756" cy="3017520"/>
+          </a:xfrm>
+          <a:prstGeom prst="rect">
+            <a:avLst/>
+          </a:prstGeom>
+        </p:spPr>
+      </p:pic>
+      <p:sp>
+        <p:nvSpPr>
+          <p:cNvPr id="21" name="flow-frame-0"/>
           <p:cNvSpPr/>
           <p:nvPr/>
         </p:nvSpPr>
         <p:spPr>
           <a:xfrm>
-            <a:off x="6245352" y="1508760"/>
-            <a:ext cx="5486400" cy="3017520"/>
+            <a:off x="6309360" y="1508760"/>
+            <a:ext cx="1372756" cy="3017520"/>
           </a:xfrm>
           <a:prstGeom prst="rect">
             <a:avLst/>
           </a:prstGeom>
           <a:solidFill>
-            <a:srgbClr val="FAFBFD"/>
+            <a:srgbClr val="FFFFFF">
+              <a:alpha val="0"/>
+            </a:srgbClr>
           </a:solidFill>
-          <a:ln w="15875">
+          <a:ln w="12700">
             <a:solidFill>
-              <a:srgbClr val="A9B4C2"/>
+              <a:srgbClr val="D9DEE7"/>
             </a:solidFill>
-            <a:prstDash val="dash"/>
+            <a:prstDash val="solid"/>
           </a:ln>
         </p:spPr>
       </p:sp>
       <p:sp>
         <p:nvSpPr>
-          <p:cNvPr id="21" name="flow-shot-label"/>
+          <p:cNvPr id="22" name="flow-cap-0"/>
           <p:cNvSpPr txBox="1"/>
           <p:nvPr/>
         </p:nvSpPr>
         <p:spPr>
           <a:xfrm>
-            <a:off x="6382512" y="1508760"/>
-            <a:ext cx="5212080" cy="3017520"/>
-          </a:xfrm>
-          <a:prstGeom prst="rect">
-            <a:avLst/>
-          </a:prstGeom>
-          <a:noFill/>
-          <a:ln/>
-        </p:spPr>
-        <p:txBody>
-          <a:bodyPr wrap="square" lIns="0" tIns="0" rIns="0" bIns="0" rtlCol="0" anchor="ctr"/>
-          <a:lstStyle/>
-          <a:p>
-            <a:pPr algn="ctr" indent="0" marL="0">
+            <a:off x="7819276" y="2377440"/>
+            <a:ext cx="1188720" cy="1280160"/>
+          </a:xfrm>
+          <a:prstGeom prst="rect">
+            <a:avLst/>
+          </a:prstGeom>
+          <a:noFill/>
+          <a:ln/>
+        </p:spPr>
+        <p:txBody>
+          <a:bodyPr wrap="square" lIns="0" tIns="0" rIns="0" bIns="0" rtlCol="0" anchor="t"/>
+          <a:lstStyle/>
+          <a:p>
+            <a:pPr indent="0" marL="0">
+              <a:buNone/>
+            </a:pPr>
+            <a:r>
+              <a:rPr lang="en-US" sz="1200" b="1" dirty="0">
+                <a:solidFill>
+                  <a:srgbClr val="15315E"/>
+                </a:solidFill>
+              </a:rPr>
+              <a:t>智能第二程</a:t>
+            </a:r>
+            <a:endParaRPr lang="en-US" sz="1200" dirty="0"/>
+          </a:p>
+          <a:p>
+            <a:pPr indent="0" marL="0">
               <a:buNone/>
             </a:pPr>
             <a:r>
               <a:rPr lang="en-US" sz="1200" dirty="0">
                 <a:solidFill>
-                  <a:srgbClr val="5B6B80"/>
-                </a:solidFill>
-              </a:rPr>
-              <a:t>待补充：智能第二程 / 行程冲突直付流程截图</a:t>
+                  <a:srgbClr val="3D4757"/>
+                </a:solidFill>
+              </a:rPr>
+              <a:t>车票待确认页，用户确认出票后走直付</a:t>
             </a:r>
             <a:endParaRPr lang="en-US" sz="1200" dirty="0"/>
           </a:p>
         </p:txBody>
       </p:sp>
-      <p:sp>
-        <p:nvSpPr>
-          <p:cNvPr id="22" name="res-card"/>
+      <p:pic>
+        <p:nvPicPr>
+          <p:cNvPr id="23" name="flow-shot-1" descr="行程冲突：提示行程冲突，用户确认出票后走直付">    </p:cNvPr>
+          <p:cNvPicPr>
+            <a:picLocks noChangeAspect="1"/>
+          </p:cNvPicPr>
+          <p:nvPr/>
+        </p:nvPicPr>
+        <p:blipFill>
+          <a:blip r:embed="rId2"/>
+          <a:stretch>
+            <a:fillRect/>
+          </a:stretch>
+        </p:blipFill>
+        <p:spPr>
+          <a:xfrm>
+            <a:off x="9052560" y="1508760"/>
+            <a:ext cx="1372756" cy="3017520"/>
+          </a:xfrm>
+          <a:prstGeom prst="rect">
+            <a:avLst/>
+          </a:prstGeom>
+        </p:spPr>
+      </p:pic>
+      <p:sp>
+        <p:nvSpPr>
+          <p:cNvPr id="24" name="flow-frame-1"/>
+          <p:cNvSpPr/>
+          <p:nvPr/>
+        </p:nvSpPr>
+        <p:spPr>
+          <a:xfrm>
+            <a:off x="9052560" y="1508760"/>
+            <a:ext cx="1372756" cy="3017520"/>
+          </a:xfrm>
+          <a:prstGeom prst="rect">
+            <a:avLst/>
+          </a:prstGeom>
+          <a:solidFill>
+            <a:srgbClr val="FFFFFF">
+              <a:alpha val="0"/>
+            </a:srgbClr>
+          </a:solidFill>
+          <a:ln w="12700">
+            <a:solidFill>
+              <a:srgbClr val="D9DEE7"/>
+            </a:solidFill>
+            <a:prstDash val="solid"/>
+          </a:ln>
+        </p:spPr>
+      </p:sp>
+      <p:sp>
+        <p:nvSpPr>
+          <p:cNvPr id="25" name="flow-cap-1"/>
+          <p:cNvSpPr txBox="1"/>
+          <p:nvPr/>
+        </p:nvSpPr>
+        <p:spPr>
+          <a:xfrm>
+            <a:off x="10562476" y="2377440"/>
+            <a:ext cx="1188720" cy="1280160"/>
+          </a:xfrm>
+          <a:prstGeom prst="rect">
+            <a:avLst/>
+          </a:prstGeom>
+          <a:noFill/>
+          <a:ln/>
+        </p:spPr>
+        <p:txBody>
+          <a:bodyPr wrap="square" lIns="0" tIns="0" rIns="0" bIns="0" rtlCol="0" anchor="t"/>
+          <a:lstStyle/>
+          <a:p>
+            <a:pPr indent="0" marL="0">
+              <a:buNone/>
+            </a:pPr>
+            <a:r>
+              <a:rPr lang="en-US" sz="1200" b="1" dirty="0">
+                <a:solidFill>
+                  <a:srgbClr val="15315E"/>
+                </a:solidFill>
+              </a:rPr>
+              <a:t>行程冲突</a:t>
+            </a:r>
+            <a:endParaRPr lang="en-US" sz="1200" dirty="0"/>
+          </a:p>
+          <a:p>
+            <a:pPr indent="0" marL="0">
+              <a:buNone/>
+            </a:pPr>
+            <a:r>
+              <a:rPr lang="en-US" sz="1200" dirty="0">
+                <a:solidFill>
+                  <a:srgbClr val="3D4757"/>
+                </a:solidFill>
+              </a:rPr>
+              <a:t>提示行程冲突，用户确认出票后走直付</a:t>
+            </a:r>
+            <a:endParaRPr lang="en-US" sz="1200" dirty="0"/>
+          </a:p>
+        </p:txBody>
+      </p:sp>
+      <p:sp>
+        <p:nvSpPr>
+          <p:cNvPr id="26" name="res-card"/>
           <p:cNvSpPr/>
           <p:nvPr/>
         </p:nvSpPr>
@@ -4437,7 +4430,7 @@
       </p:sp>
       <p:sp>
         <p:nvSpPr>
-          <p:cNvPr id="23" name="res-h"/>
+          <p:cNvPr id="27" name="res-h"/>
           <p:cNvSpPr txBox="1"/>
           <p:nvPr/>
         </p:nvSpPr>
@@ -4473,7 +4466,7 @@
       </p:sp>
       <p:sp>
         <p:nvSpPr>
-          <p:cNvPr id="24" name="res-label"/>
+          <p:cNvPr id="28" name="res-label"/>
           <p:cNvSpPr txBox="1"/>
           <p:nvPr/>
         </p:nvSpPr>
@@ -4509,7 +4502,7 @@
       </p:sp>
       <p:sp>
         <p:nvSpPr>
-          <p:cNvPr id="25" name="res-value"/>
+          <p:cNvPr id="29" name="res-value"/>
           <p:cNvSpPr txBox="1"/>
           <p:nvPr/>
         </p:nvSpPr>
@@ -4896,70 +4889,110 @@
           </a:p>
         </p:txBody>
       </p:sp>
-      <p:sp>
-        <p:nvSpPr>
-          <p:cNvPr id="12" name="ba-shot-frame"/>
+      <p:pic>
+        <p:nvPicPr>
+          <p:cNvPr id="12" name="ba-shot" descr="订单详情页添加方案：有票方案入口">    </p:cNvPr>
+          <p:cNvPicPr>
+            <a:picLocks noChangeAspect="1"/>
+          </p:cNvPicPr>
+          <p:nvPr/>
+        </p:nvPicPr>
+        <p:blipFill>
+          <a:blip r:embed="rId1"/>
+          <a:stretch>
+            <a:fillRect/>
+          </a:stretch>
+        </p:blipFill>
+        <p:spPr>
+          <a:xfrm>
+            <a:off x="457200" y="4114800"/>
+            <a:ext cx="2675347" cy="2103120"/>
+          </a:xfrm>
+          <a:prstGeom prst="rect">
+            <a:avLst/>
+          </a:prstGeom>
+        </p:spPr>
+      </p:pic>
+      <p:sp>
+        <p:nvSpPr>
+          <p:cNvPr id="13" name="ba-frame"/>
           <p:cNvSpPr/>
           <p:nvPr/>
         </p:nvSpPr>
         <p:spPr>
           <a:xfrm>
             <a:off x="457200" y="4114800"/>
-            <a:ext cx="5760720" cy="2103120"/>
+            <a:ext cx="2675347" cy="2103120"/>
           </a:xfrm>
           <a:prstGeom prst="rect">
             <a:avLst/>
           </a:prstGeom>
           <a:solidFill>
-            <a:srgbClr val="FAFBFD"/>
+            <a:srgbClr val="FFFFFF">
+              <a:alpha val="0"/>
+            </a:srgbClr>
           </a:solidFill>
-          <a:ln w="15875">
+          <a:ln w="12700">
             <a:solidFill>
-              <a:srgbClr val="A9B4C2"/>
+              <a:srgbClr val="D9DEE7"/>
             </a:solidFill>
-            <a:prstDash val="dash"/>
+            <a:prstDash val="solid"/>
           </a:ln>
         </p:spPr>
       </p:sp>
       <p:sp>
         <p:nvSpPr>
-          <p:cNvPr id="13" name="ba-shot-label"/>
+          <p:cNvPr id="14" name="ba-cap"/>
           <p:cNvSpPr txBox="1"/>
           <p:nvPr/>
         </p:nvSpPr>
         <p:spPr>
           <a:xfrm>
-            <a:off x="594360" y="4114800"/>
-            <a:ext cx="5486400" cy="2103120"/>
-          </a:xfrm>
-          <a:prstGeom prst="rect">
-            <a:avLst/>
-          </a:prstGeom>
-          <a:noFill/>
-          <a:ln/>
-        </p:spPr>
-        <p:txBody>
-          <a:bodyPr wrap="square" lIns="0" tIns="0" rIns="0" bIns="0" rtlCol="0" anchor="ctr"/>
-          <a:lstStyle/>
-          <a:p>
-            <a:pPr algn="ctr" indent="0" marL="0">
-              <a:buNone/>
-            </a:pPr>
-            <a:r>
-              <a:rPr lang="en-US" sz="1200" dirty="0">
-                <a:solidFill>
-                  <a:srgbClr val="5B6B80"/>
-                </a:solidFill>
-              </a:rPr>
-              <a:t>待补充：改单有票方案页面截图（抢转买入口）</a:t>
-            </a:r>
-            <a:endParaRPr lang="en-US" sz="1200" dirty="0"/>
-          </a:p>
-        </p:txBody>
-      </p:sp>
-      <p:sp>
-        <p:nvSpPr>
-          <p:cNvPr id="14" name="res-head"/>
+            <a:off x="3337560" y="4480560"/>
+            <a:ext cx="2834640" cy="1371600"/>
+          </a:xfrm>
+          <a:prstGeom prst="rect">
+            <a:avLst/>
+          </a:prstGeom>
+          <a:noFill/>
+          <a:ln/>
+        </p:spPr>
+        <p:txBody>
+          <a:bodyPr wrap="square" lIns="0" tIns="0" rIns="0" bIns="0" rtlCol="0" anchor="t"/>
+          <a:lstStyle/>
+          <a:p>
+            <a:pPr indent="0" marL="0">
+              <a:buNone/>
+            </a:pPr>
+            <a:r>
+              <a:rPr lang="en-US" sz="1250" b="1" dirty="0">
+                <a:solidFill>
+                  <a:srgbClr val="15315E"/>
+                </a:solidFill>
+              </a:rPr>
+              <a:t>订单详情页 · 添加方案</a:t>
+            </a:r>
+            <a:endParaRPr lang="en-US" sz="1250" dirty="0"/>
+          </a:p>
+          <a:p>
+            <a:pPr indent="0" marL="0">
+              <a:buNone/>
+            </a:pPr>
+            <a:r>
+              <a:rPr lang="en-US" sz="1250" dirty="0">
+                <a:solidFill>
+                  <a:srgbClr val="3D4757"/>
+                </a:solidFill>
+              </a:rPr>
+              <a:t>选择有票方案可立即出票；支付宝（非黑名单）订单走抢转买出票</a:t>
+            </a:r>
+            <a:endParaRPr lang="en-US" sz="1250" dirty="0"/>
+          </a:p>
+        </p:txBody>
+      </p:sp>
+      <p:sp>
+        <p:nvSpPr>
+          <p:cNvPr id="15" name="res-head"/>
           <p:cNvSpPr txBox="1"/>
           <p:nvPr/>
         </p:nvSpPr>
@@ -4995,7 +5028,7 @@
       </p:sp>
       <p:sp>
         <p:nvSpPr>
-          <p:cNvPr id="15" name="chart-cap"/>
+          <p:cNvPr id="16" name="chart-cap"/>
           <p:cNvSpPr txBox="1"/>
           <p:nvPr/>
         </p:nvSpPr>
@@ -5031,7 +5064,7 @@
       </p:sp>
       <p:graphicFrame>
         <p:nvGraphicFramePr>
-          <p:cNvPr id="16" name="sr-chart" descr=""/>
+          <p:cNvPr id="17" name="sr-chart" descr=""/>
           <p:cNvGraphicFramePr/>
           <p:nvPr/>
         </p:nvGraphicFramePr>
@@ -5041,13 +5074,13 @@
         </p:xfrm>
         <a:graphic xmlns:a="http://schemas.openxmlformats.org/drawingml/2006/main">
           <a:graphicData uri="http://schemas.openxmlformats.org/drawingml/2006/chart">
-            <c:chart xmlns:c="http://schemas.openxmlformats.org/drawingml/2006/chart" r:id="rId1"/>
+            <c:chart xmlns:c="http://schemas.openxmlformats.org/drawingml/2006/chart" r:id="rId2"/>
           </a:graphicData>
         </a:graphic>
       </p:graphicFrame>
       <p:sp>
         <p:nvSpPr>
-          <p:cNvPr id="17" name="k1-card"/>
+          <p:cNvPr id="18" name="k1-card"/>
           <p:cNvSpPr/>
           <p:nvPr/>
         </p:nvSpPr>
@@ -5074,7 +5107,7 @@
       </p:sp>
       <p:sp>
         <p:nvSpPr>
-          <p:cNvPr id="18" name="k1-l"/>
+          <p:cNvPr id="19" name="k1-l"/>
           <p:cNvSpPr txBox="1"/>
           <p:nvPr/>
         </p:nvSpPr>
@@ -5110,7 +5143,7 @@
       </p:sp>
       <p:sp>
         <p:nvSpPr>
-          <p:cNvPr id="19" name="k1-v"/>
+          <p:cNvPr id="20" name="k1-v"/>
           <p:cNvSpPr txBox="1"/>
           <p:nvPr/>
         </p:nvSpPr>
@@ -5146,7 +5179,7 @@
       </p:sp>
       <p:sp>
         <p:nvSpPr>
-          <p:cNvPr id="20" name="k1-s"/>
+          <p:cNvPr id="21" name="k1-s"/>
           <p:cNvSpPr txBox="1"/>
           <p:nvPr/>
         </p:nvSpPr>
@@ -5182,7 +5215,7 @@
       </p:sp>
       <p:sp>
         <p:nvSpPr>
-          <p:cNvPr id="21" name="k2-card"/>
+          <p:cNvPr id="22" name="k2-card"/>
           <p:cNvSpPr/>
           <p:nvPr/>
         </p:nvSpPr>
@@ -5209,7 +5242,7 @@
       </p:sp>
       <p:sp>
         <p:nvSpPr>
-          <p:cNvPr id="22" name="k2-l"/>
+          <p:cNvPr id="23" name="k2-l"/>
           <p:cNvSpPr txBox="1"/>
           <p:nvPr/>
         </p:nvSpPr>
@@ -5245,7 +5278,7 @@
       </p:sp>
       <p:sp>
         <p:nvSpPr>
-          <p:cNvPr id="23" name="k2-v"/>
+          <p:cNvPr id="24" name="k2-v"/>
           <p:cNvSpPr txBox="1"/>
           <p:nvPr/>
         </p:nvSpPr>

--- a/成功率专项.pptx
+++ b/成功率专项.pptx
@@ -110,7 +110,7 @@
   <p:extLst>
     <p:ext uri="{521415D9-36F7-43E2-AB2F-B90AF26B5E84}">
       <p14:sectionLst xmlns:p14="http://schemas.microsoft.com/office/powerpoint/2010/main">
-        <p14:section name="成功率专项" id="{ea5be0a5-1a87-8418-72c4-9ab2dd00cd68}">
+        <p14:section name="成功率专项" id="{8af09096-e206-d370-e0d2-78c74c231cf4}">
           <p14:sldIdLst>
             <p14:sldId id="256"/>
             <p14:sldId id="257"/>
@@ -1648,54 +1648,117 @@
       </p:sp>
       <p:sp>
         <p:nvSpPr>
-          <p:cNvPr id="4" name="chain-head"/>
-          <p:cNvSpPr txBox="1"/>
+          <p:cNvPr id="4" name="bg-chip"/>
+          <p:cNvSpPr/>
           <p:nvPr/>
         </p:nvSpPr>
         <p:spPr>
           <a:xfrm>
             <a:off x="457200" y="1508760"/>
-            <a:ext cx="6949440" cy="320040"/>
-          </a:xfrm>
-          <a:prstGeom prst="rect">
-            <a:avLst/>
-          </a:prstGeom>
-          <a:noFill/>
-          <a:ln/>
-        </p:spPr>
-        <p:txBody>
-          <a:bodyPr wrap="square" lIns="0" tIns="0" rIns="0" bIns="0" rtlCol="0" anchor="t"/>
-          <a:lstStyle/>
-          <a:p>
-            <a:pPr indent="0" marL="0">
-              <a:buNone/>
-            </a:pPr>
-            <a:r>
-              <a:rPr lang="en-US" sz="1600" b="1" dirty="0">
-                <a:solidFill>
-                  <a:srgbClr val="287DFA"/>
-                </a:solidFill>
-              </a:rPr>
-              <a:t>出票链路：扣位成功后必须向 12306 支付</a:t>
-            </a:r>
-            <a:endParaRPr lang="en-US" sz="1600" dirty="0"/>
-          </a:p>
-        </p:txBody>
-      </p:sp>
-      <p:sp>
-        <p:nvSpPr>
-          <p:cNvPr id="5" name="node-0"/>
-          <p:cNvSpPr/>
-          <p:nvPr/>
-        </p:nvSpPr>
-        <p:spPr>
-          <a:xfrm>
-            <a:off x="457200" y="1965960"/>
-            <a:ext cx="1463040" cy="777240"/>
+            <a:ext cx="713232" cy="329184"/>
           </a:xfrm>
           <a:prstGeom prst="roundRect">
             <a:avLst>
-              <a:gd name="adj" fmla="val 9412"/>
+              <a:gd name="adj" fmla="val 16667"/>
+            </a:avLst>
+          </a:prstGeom>
+          <a:solidFill>
+            <a:srgbClr val="287DFA"/>
+          </a:solidFill>
+          <a:ln w="12700">
+            <a:solidFill>
+              <a:srgbClr val="287DFA"/>
+            </a:solidFill>
+            <a:prstDash val="solid"/>
+          </a:ln>
+        </p:spPr>
+      </p:sp>
+      <p:sp>
+        <p:nvSpPr>
+          <p:cNvPr id="5" name="bg-chip-t"/>
+          <p:cNvSpPr txBox="1"/>
+          <p:nvPr/>
+        </p:nvSpPr>
+        <p:spPr>
+          <a:xfrm>
+            <a:off x="457200" y="1508760"/>
+            <a:ext cx="713232" cy="329184"/>
+          </a:xfrm>
+          <a:prstGeom prst="rect">
+            <a:avLst/>
+          </a:prstGeom>
+          <a:noFill/>
+          <a:ln/>
+        </p:spPr>
+        <p:txBody>
+          <a:bodyPr wrap="square" lIns="0" tIns="0" rIns="0" bIns="0" rtlCol="0" anchor="ctr"/>
+          <a:lstStyle/>
+          <a:p>
+            <a:pPr algn="ctr" indent="0" marL="0">
+              <a:buNone/>
+            </a:pPr>
+            <a:r>
+              <a:rPr lang="en-US" sz="1300" b="1" dirty="0">
+                <a:solidFill>
+                  <a:srgbClr val="FFFFFF"/>
+                </a:solidFill>
+              </a:rPr>
+              <a:t>背景</a:t>
+            </a:r>
+            <a:endParaRPr lang="en-US" sz="1300" dirty="0"/>
+          </a:p>
+        </p:txBody>
+      </p:sp>
+      <p:sp>
+        <p:nvSpPr>
+          <p:cNvPr id="6" name="bg-text"/>
+          <p:cNvSpPr txBox="1"/>
+          <p:nvPr/>
+        </p:nvSpPr>
+        <p:spPr>
+          <a:xfrm>
+            <a:off x="1325880" y="1508760"/>
+            <a:ext cx="6035040" cy="457200"/>
+          </a:xfrm>
+          <a:prstGeom prst="rect">
+            <a:avLst/>
+          </a:prstGeom>
+          <a:noFill/>
+          <a:ln/>
+        </p:spPr>
+        <p:txBody>
+          <a:bodyPr wrap="square" lIns="0" tIns="0" rIns="0" bIns="0" rtlCol="0" anchor="ctr"/>
+          <a:lstStyle/>
+          <a:p>
+            <a:pPr indent="0" marL="0">
+              <a:buNone/>
+            </a:pPr>
+            <a:r>
+              <a:rPr lang="en-US" sz="1300" dirty="0">
+                <a:solidFill>
+                  <a:srgbClr val="3D4757"/>
+                </a:solidFill>
+              </a:rPr>
+              <a:t>抢票出票都要经过扣位成功后向 12306 支付；风控后只有支付宝订单能代付，其余订单需召回用户直付</a:t>
+            </a:r>
+            <a:endParaRPr lang="en-US" sz="1300" dirty="0"/>
+          </a:p>
+        </p:txBody>
+      </p:sp>
+      <p:sp>
+        <p:nvSpPr>
+          <p:cNvPr id="7" name="node-0"/>
+          <p:cNvSpPr/>
+          <p:nvPr/>
+        </p:nvSpPr>
+        <p:spPr>
+          <a:xfrm>
+            <a:off x="457200" y="2148840"/>
+            <a:ext cx="1463040" cy="731520"/>
+          </a:xfrm>
+          <a:prstGeom prst="roundRect">
+            <a:avLst>
+              <a:gd name="adj" fmla="val 10000"/>
             </a:avLst>
           </a:prstGeom>
           <a:solidFill>
@@ -1711,14 +1774,14 @@
       </p:sp>
       <p:sp>
         <p:nvSpPr>
-          <p:cNvPr id="6" name="node-t-0"/>
+          <p:cNvPr id="8" name="node-t-0"/>
           <p:cNvSpPr txBox="1"/>
           <p:nvPr/>
         </p:nvSpPr>
         <p:spPr>
           <a:xfrm>
-            <a:off x="457200" y="1965960"/>
-            <a:ext cx="1463040" cy="777240"/>
+            <a:off x="457200" y="2148840"/>
+            <a:ext cx="1463040" cy="731520"/>
           </a:xfrm>
           <a:prstGeom prst="rect">
             <a:avLst/>
@@ -1761,13 +1824,13 @@
       </p:sp>
       <p:sp>
         <p:nvSpPr>
-          <p:cNvPr id="7" name="arrow-0"/>
+          <p:cNvPr id="9" name="arrow-0"/>
           <p:cNvSpPr/>
           <p:nvPr/>
         </p:nvSpPr>
         <p:spPr>
           <a:xfrm>
-            <a:off x="1984248" y="2253996"/>
+            <a:off x="1984248" y="2414016"/>
             <a:ext cx="219456" cy="201168"/>
           </a:xfrm>
           <a:prstGeom prst="rightArrow">
@@ -1786,18 +1849,18 @@
       </p:sp>
       <p:sp>
         <p:nvSpPr>
-          <p:cNvPr id="8" name="node-1"/>
+          <p:cNvPr id="10" name="node-1"/>
           <p:cNvSpPr/>
           <p:nvPr/>
         </p:nvSpPr>
         <p:spPr>
           <a:xfrm>
-            <a:off x="2267712" y="1965960"/>
-            <a:ext cx="1463040" cy="777240"/>
+            <a:off x="2267712" y="2148840"/>
+            <a:ext cx="1463040" cy="731520"/>
           </a:xfrm>
           <a:prstGeom prst="roundRect">
             <a:avLst>
-              <a:gd name="adj" fmla="val 9412"/>
+              <a:gd name="adj" fmla="val 10000"/>
             </a:avLst>
           </a:prstGeom>
           <a:solidFill>
@@ -1813,14 +1876,14 @@
       </p:sp>
       <p:sp>
         <p:nvSpPr>
-          <p:cNvPr id="9" name="node-t-1"/>
+          <p:cNvPr id="11" name="node-t-1"/>
           <p:cNvSpPr txBox="1"/>
           <p:nvPr/>
         </p:nvSpPr>
         <p:spPr>
           <a:xfrm>
-            <a:off x="2267712" y="1965960"/>
-            <a:ext cx="1463040" cy="777240"/>
+            <a:off x="2267712" y="2148840"/>
+            <a:ext cx="1463040" cy="731520"/>
           </a:xfrm>
           <a:prstGeom prst="rect">
             <a:avLst/>
@@ -1849,13 +1912,13 @@
       </p:sp>
       <p:sp>
         <p:nvSpPr>
-          <p:cNvPr id="10" name="arrow-1"/>
+          <p:cNvPr id="12" name="arrow-1"/>
           <p:cNvSpPr/>
           <p:nvPr/>
         </p:nvSpPr>
         <p:spPr>
           <a:xfrm>
-            <a:off x="3794760" y="2253996"/>
+            <a:off x="3794760" y="2414016"/>
             <a:ext cx="219456" cy="201168"/>
           </a:xfrm>
           <a:prstGeom prst="rightArrow">
@@ -1874,18 +1937,18 @@
       </p:sp>
       <p:sp>
         <p:nvSpPr>
-          <p:cNvPr id="11" name="node-2"/>
+          <p:cNvPr id="13" name="node-2"/>
           <p:cNvSpPr/>
           <p:nvPr/>
         </p:nvSpPr>
         <p:spPr>
           <a:xfrm>
-            <a:off x="4078224" y="1965960"/>
-            <a:ext cx="1463040" cy="777240"/>
+            <a:off x="4078224" y="2148840"/>
+            <a:ext cx="1463040" cy="731520"/>
           </a:xfrm>
           <a:prstGeom prst="roundRect">
             <a:avLst>
-              <a:gd name="adj" fmla="val 9412"/>
+              <a:gd name="adj" fmla="val 10000"/>
             </a:avLst>
           </a:prstGeom>
           <a:solidFill>
@@ -1901,14 +1964,14 @@
       </p:sp>
       <p:sp>
         <p:nvSpPr>
-          <p:cNvPr id="12" name="node-t-2"/>
+          <p:cNvPr id="14" name="node-t-2"/>
           <p:cNvSpPr txBox="1"/>
           <p:nvPr/>
         </p:nvSpPr>
         <p:spPr>
           <a:xfrm>
-            <a:off x="4078224" y="1965960"/>
-            <a:ext cx="1463040" cy="777240"/>
+            <a:off x="4078224" y="2148840"/>
+            <a:ext cx="1463040" cy="731520"/>
           </a:xfrm>
           <a:prstGeom prst="rect">
             <a:avLst/>
@@ -1937,13 +2000,13 @@
       </p:sp>
       <p:sp>
         <p:nvSpPr>
-          <p:cNvPr id="13" name="arrow-2"/>
+          <p:cNvPr id="15" name="arrow-2"/>
           <p:cNvSpPr/>
           <p:nvPr/>
         </p:nvSpPr>
         <p:spPr>
           <a:xfrm>
-            <a:off x="5605272" y="2253996"/>
+            <a:off x="5605272" y="2414016"/>
             <a:ext cx="219456" cy="201168"/>
           </a:xfrm>
           <a:prstGeom prst="rightArrow">
@@ -1962,18 +2025,18 @@
       </p:sp>
       <p:sp>
         <p:nvSpPr>
-          <p:cNvPr id="14" name="node-3"/>
+          <p:cNvPr id="16" name="node-3"/>
           <p:cNvSpPr/>
           <p:nvPr/>
         </p:nvSpPr>
         <p:spPr>
           <a:xfrm>
-            <a:off x="5888736" y="1965960"/>
-            <a:ext cx="1463040" cy="777240"/>
+            <a:off x="5888736" y="2148840"/>
+            <a:ext cx="1463040" cy="731520"/>
           </a:xfrm>
           <a:prstGeom prst="roundRect">
             <a:avLst>
-              <a:gd name="adj" fmla="val 9412"/>
+              <a:gd name="adj" fmla="val 10000"/>
             </a:avLst>
           </a:prstGeom>
           <a:solidFill>
@@ -1989,14 +2052,14 @@
       </p:sp>
       <p:sp>
         <p:nvSpPr>
-          <p:cNvPr id="15" name="node-t-3"/>
+          <p:cNvPr id="17" name="node-t-3"/>
           <p:cNvSpPr txBox="1"/>
           <p:nvPr/>
         </p:nvSpPr>
         <p:spPr>
           <a:xfrm>
-            <a:off x="5888736" y="1965960"/>
-            <a:ext cx="1463040" cy="777240"/>
+            <a:off x="5888736" y="2148840"/>
+            <a:ext cx="1463040" cy="731520"/>
           </a:xfrm>
           <a:prstGeom prst="rect">
             <a:avLst/>
@@ -2025,18 +2088,110 @@
       </p:sp>
       <p:sp>
         <p:nvSpPr>
-          <p:cNvPr id="16" name="ok-box"/>
+          <p:cNvPr id="18" name="split-stem"/>
           <p:cNvSpPr/>
           <p:nvPr/>
         </p:nvSpPr>
         <p:spPr>
           <a:xfrm>
-            <a:off x="457200" y="3246120"/>
-            <a:ext cx="3291840" cy="914400"/>
+            <a:off x="4809744" y="2880360"/>
+            <a:ext cx="0" cy="228600"/>
+          </a:xfrm>
+          <a:prstGeom prst="line">
+            <a:avLst/>
+          </a:prstGeom>
+          <a:noFill/>
+          <a:ln w="19050">
+            <a:solidFill>
+              <a:srgbClr val="8FB8F5"/>
+            </a:solidFill>
+            <a:prstDash val="solid"/>
+          </a:ln>
+        </p:spPr>
+      </p:sp>
+      <p:sp>
+        <p:nvSpPr>
+          <p:cNvPr id="19" name="split-bar"/>
+          <p:cNvSpPr/>
+          <p:nvPr/>
+        </p:nvSpPr>
+        <p:spPr>
+          <a:xfrm>
+            <a:off x="2103120" y="3108960"/>
+            <a:ext cx="3566160" cy="0"/>
+          </a:xfrm>
+          <a:prstGeom prst="line">
+            <a:avLst/>
+          </a:prstGeom>
+          <a:noFill/>
+          <a:ln w="19050">
+            <a:solidFill>
+              <a:srgbClr val="8FB8F5"/>
+            </a:solidFill>
+            <a:prstDash val="solid"/>
+          </a:ln>
+        </p:spPr>
+      </p:sp>
+      <p:sp>
+        <p:nvSpPr>
+          <p:cNvPr id="20" name="split-l"/>
+          <p:cNvSpPr/>
+          <p:nvPr/>
+        </p:nvSpPr>
+        <p:spPr>
+          <a:xfrm>
+            <a:off x="2103120" y="3108960"/>
+            <a:ext cx="0" cy="201168"/>
+          </a:xfrm>
+          <a:prstGeom prst="line">
+            <a:avLst/>
+          </a:prstGeom>
+          <a:noFill/>
+          <a:ln w="19050">
+            <a:solidFill>
+              <a:srgbClr val="8FB8F5"/>
+            </a:solidFill>
+            <a:prstDash val="solid"/>
+          </a:ln>
+        </p:spPr>
+      </p:sp>
+      <p:sp>
+        <p:nvSpPr>
+          <p:cNvPr id="21" name="split-r"/>
+          <p:cNvSpPr/>
+          <p:nvPr/>
+        </p:nvSpPr>
+        <p:spPr>
+          <a:xfrm>
+            <a:off x="5669280" y="3108960"/>
+            <a:ext cx="0" cy="201168"/>
+          </a:xfrm>
+          <a:prstGeom prst="line">
+            <a:avLst/>
+          </a:prstGeom>
+          <a:noFill/>
+          <a:ln w="19050">
+            <a:solidFill>
+              <a:srgbClr val="8FB8F5"/>
+            </a:solidFill>
+            <a:prstDash val="solid"/>
+          </a:ln>
+        </p:spPr>
+      </p:sp>
+      <p:sp>
+        <p:nvSpPr>
+          <p:cNvPr id="22" name="ok-box"/>
+          <p:cNvSpPr/>
+          <p:nvPr/>
+        </p:nvSpPr>
+        <p:spPr>
+          <a:xfrm>
+            <a:off x="457200" y="3310128"/>
+            <a:ext cx="3291840" cy="868680"/>
           </a:xfrm>
           <a:prstGeom prst="roundRect">
             <a:avLst>
-              <a:gd name="adj" fmla="val 8000"/>
+              <a:gd name="adj" fmla="val 8421"/>
             </a:avLst>
           </a:prstGeom>
           <a:solidFill>
@@ -2052,14 +2207,14 @@
       </p:sp>
       <p:sp>
         <p:nvSpPr>
-          <p:cNvPr id="17" name="ok-text"/>
+          <p:cNvPr id="23" name="ok-text"/>
           <p:cNvSpPr txBox="1"/>
           <p:nvPr/>
         </p:nvSpPr>
         <p:spPr>
           <a:xfrm>
-            <a:off x="594360" y="3246120"/>
-            <a:ext cx="3017520" cy="914400"/>
+            <a:off x="594360" y="3310128"/>
+            <a:ext cx="3017520" cy="868680"/>
           </a:xfrm>
           <a:prstGeom prst="rect">
             <a:avLst/>
@@ -2102,18 +2257,18 @@
       </p:sp>
       <p:sp>
         <p:nvSpPr>
-          <p:cNvPr id="18" name="bad-box"/>
+          <p:cNvPr id="24" name="bad-box"/>
           <p:cNvSpPr/>
           <p:nvPr/>
         </p:nvSpPr>
         <p:spPr>
           <a:xfrm>
-            <a:off x="4023360" y="3246120"/>
-            <a:ext cx="3291840" cy="914400"/>
+            <a:off x="4023360" y="3310128"/>
+            <a:ext cx="3291840" cy="868680"/>
           </a:xfrm>
           <a:prstGeom prst="roundRect">
             <a:avLst>
-              <a:gd name="adj" fmla="val 8000"/>
+              <a:gd name="adj" fmla="val 8421"/>
             </a:avLst>
           </a:prstGeom>
           <a:solidFill>
@@ -2129,14 +2284,14 @@
       </p:sp>
       <p:sp>
         <p:nvSpPr>
-          <p:cNvPr id="19" name="bad-text"/>
+          <p:cNvPr id="25" name="bad-text"/>
           <p:cNvSpPr txBox="1"/>
           <p:nvPr/>
         </p:nvSpPr>
         <p:spPr>
           <a:xfrm>
-            <a:off x="4160520" y="3246120"/>
-            <a:ext cx="3017520" cy="914400"/>
+            <a:off x="4160520" y="3310128"/>
+            <a:ext cx="3017520" cy="868680"/>
           </a:xfrm>
           <a:prstGeom prst="rect">
             <a:avLst/>
@@ -2171,7 +2326,7 @@
                   <a:srgbClr val="3D4757"/>
                 </a:solidFill>
               </a:rPr>
-              <a:t>只能召回用户直付，存在流失漏斗</a:t>
+              <a:t>召回用户直付，存在流失漏斗</a:t>
             </a:r>
             <a:endParaRPr lang="en-US" sz="1300" dirty="0"/>
           </a:p>
@@ -2179,106 +2334,14 @@
       </p:sp>
       <p:sp>
         <p:nvSpPr>
-          <p:cNvPr id="20" name="split-stem"/>
+          <p:cNvPr id="26" name="trend-frame"/>
           <p:cNvSpPr/>
           <p:nvPr/>
         </p:nvSpPr>
         <p:spPr>
           <a:xfrm>
-            <a:off x="4809744" y="2743200"/>
-            <a:ext cx="0" cy="274320"/>
-          </a:xfrm>
-          <a:prstGeom prst="line">
-            <a:avLst/>
-          </a:prstGeom>
-          <a:noFill/>
-          <a:ln w="19050">
-            <a:solidFill>
-              <a:srgbClr val="8FB8F5"/>
-            </a:solidFill>
-            <a:prstDash val="solid"/>
-          </a:ln>
-        </p:spPr>
-      </p:sp>
-      <p:sp>
-        <p:nvSpPr>
-          <p:cNvPr id="21" name="split-bar"/>
-          <p:cNvSpPr/>
-          <p:nvPr/>
-        </p:nvSpPr>
-        <p:spPr>
-          <a:xfrm>
-            <a:off x="2103120" y="3017520"/>
-            <a:ext cx="3566160" cy="0"/>
-          </a:xfrm>
-          <a:prstGeom prst="line">
-            <a:avLst/>
-          </a:prstGeom>
-          <a:noFill/>
-          <a:ln w="19050">
-            <a:solidFill>
-              <a:srgbClr val="8FB8F5"/>
-            </a:solidFill>
-            <a:prstDash val="solid"/>
-          </a:ln>
-        </p:spPr>
-      </p:sp>
-      <p:sp>
-        <p:nvSpPr>
-          <p:cNvPr id="22" name="split-l"/>
-          <p:cNvSpPr/>
-          <p:nvPr/>
-        </p:nvSpPr>
-        <p:spPr>
-          <a:xfrm>
-            <a:off x="2103120" y="3017520"/>
-            <a:ext cx="0" cy="228600"/>
-          </a:xfrm>
-          <a:prstGeom prst="line">
-            <a:avLst/>
-          </a:prstGeom>
-          <a:noFill/>
-          <a:ln w="19050">
-            <a:solidFill>
-              <a:srgbClr val="8FB8F5"/>
-            </a:solidFill>
-            <a:prstDash val="solid"/>
-          </a:ln>
-        </p:spPr>
-      </p:sp>
-      <p:sp>
-        <p:nvSpPr>
-          <p:cNvPr id="23" name="split-r"/>
-          <p:cNvSpPr/>
-          <p:nvPr/>
-        </p:nvSpPr>
-        <p:spPr>
-          <a:xfrm>
-            <a:off x="5669280" y="3017520"/>
-            <a:ext cx="0" cy="228600"/>
-          </a:xfrm>
-          <a:prstGeom prst="line">
-            <a:avLst/>
-          </a:prstGeom>
-          <a:noFill/>
-          <a:ln w="19050">
-            <a:solidFill>
-              <a:srgbClr val="8FB8F5"/>
-            </a:solidFill>
-            <a:prstDash val="solid"/>
-          </a:ln>
-        </p:spPr>
-      </p:sp>
-      <p:sp>
-        <p:nvSpPr>
-          <p:cNvPr id="24" name="trend-frame"/>
-          <p:cNvSpPr/>
-          <p:nvPr/>
-        </p:nvSpPr>
-        <p:spPr>
-          <a:xfrm>
             <a:off x="7772400" y="1508760"/>
-            <a:ext cx="3959352" cy="2651760"/>
+            <a:ext cx="3959352" cy="2697480"/>
           </a:xfrm>
           <a:prstGeom prst="rect">
             <a:avLst/>
@@ -2296,14 +2359,14 @@
       </p:sp>
       <p:sp>
         <p:nvSpPr>
-          <p:cNvPr id="25" name="trend-label"/>
+          <p:cNvPr id="27" name="trend-label"/>
           <p:cNvSpPr txBox="1"/>
           <p:nvPr/>
         </p:nvSpPr>
         <p:spPr>
           <a:xfrm>
             <a:off x="7909560" y="1508760"/>
-            <a:ext cx="3685032" cy="2651760"/>
+            <a:ext cx="3685032" cy="2697480"/>
           </a:xfrm>
           <a:prstGeom prst="rect">
             <a:avLst/>
@@ -2346,54 +2409,117 @@
       </p:sp>
       <p:sp>
         <p:nvSpPr>
-          <p:cNvPr id="26" name="path-head"/>
-          <p:cNvSpPr txBox="1"/>
-          <p:nvPr/>
-        </p:nvSpPr>
-        <p:spPr>
-          <a:xfrm>
-            <a:off x="457200" y="4389120"/>
-            <a:ext cx="5486400" cy="320040"/>
-          </a:xfrm>
-          <a:prstGeom prst="rect">
-            <a:avLst/>
-          </a:prstGeom>
-          <a:noFill/>
-          <a:ln/>
-        </p:spPr>
-        <p:txBody>
-          <a:bodyPr wrap="square" lIns="0" tIns="0" rIns="0" bIns="0" rtlCol="0" anchor="t"/>
-          <a:lstStyle/>
-          <a:p>
-            <a:pPr indent="0" marL="0">
-              <a:buNone/>
-            </a:pPr>
-            <a:r>
-              <a:rPr lang="en-US" sz="1600" b="1" dirty="0">
-                <a:solidFill>
-                  <a:srgbClr val="287DFA"/>
-                </a:solidFill>
-              </a:rPr>
-              <a:t>支付挽回的两条路径</a:t>
-            </a:r>
-            <a:endParaRPr lang="en-US" sz="1600" dirty="0"/>
-          </a:p>
-        </p:txBody>
-      </p:sp>
-      <p:sp>
-        <p:nvSpPr>
-          <p:cNvPr id="27" name="path-card-0"/>
+          <p:cNvPr id="28" name="st-chip"/>
           <p:cNvSpPr/>
           <p:nvPr/>
         </p:nvSpPr>
         <p:spPr>
           <a:xfrm>
-            <a:off x="457200" y="4800600"/>
-            <a:ext cx="5486400" cy="1417320"/>
+            <a:off x="457200" y="4434840"/>
+            <a:ext cx="713232" cy="329184"/>
           </a:xfrm>
           <a:prstGeom prst="roundRect">
             <a:avLst>
-              <a:gd name="adj" fmla="val 5161"/>
+              <a:gd name="adj" fmla="val 16667"/>
+            </a:avLst>
+          </a:prstGeom>
+          <a:solidFill>
+            <a:srgbClr val="287DFA"/>
+          </a:solidFill>
+          <a:ln w="12700">
+            <a:solidFill>
+              <a:srgbClr val="287DFA"/>
+            </a:solidFill>
+            <a:prstDash val="solid"/>
+          </a:ln>
+        </p:spPr>
+      </p:sp>
+      <p:sp>
+        <p:nvSpPr>
+          <p:cNvPr id="29" name="st-chip-t"/>
+          <p:cNvSpPr txBox="1"/>
+          <p:nvPr/>
+        </p:nvSpPr>
+        <p:spPr>
+          <a:xfrm>
+            <a:off x="457200" y="4434840"/>
+            <a:ext cx="713232" cy="329184"/>
+          </a:xfrm>
+          <a:prstGeom prst="rect">
+            <a:avLst/>
+          </a:prstGeom>
+          <a:noFill/>
+          <a:ln/>
+        </p:spPr>
+        <p:txBody>
+          <a:bodyPr wrap="square" lIns="0" tIns="0" rIns="0" bIns="0" rtlCol="0" anchor="ctr"/>
+          <a:lstStyle/>
+          <a:p>
+            <a:pPr algn="ctr" indent="0" marL="0">
+              <a:buNone/>
+            </a:pPr>
+            <a:r>
+              <a:rPr lang="en-US" sz="1300" b="1" dirty="0">
+                <a:solidFill>
+                  <a:srgbClr val="FFFFFF"/>
+                </a:solidFill>
+              </a:rPr>
+              <a:t>策略</a:t>
+            </a:r>
+            <a:endParaRPr lang="en-US" sz="1300" dirty="0"/>
+          </a:p>
+        </p:txBody>
+      </p:sp>
+      <p:sp>
+        <p:nvSpPr>
+          <p:cNvPr id="30" name="st-text"/>
+          <p:cNvSpPr txBox="1"/>
+          <p:nvPr/>
+        </p:nvSpPr>
+        <p:spPr>
+          <a:xfrm>
+            <a:off x="1325880" y="4434840"/>
+            <a:ext cx="4572000" cy="329184"/>
+          </a:xfrm>
+          <a:prstGeom prst="rect">
+            <a:avLst/>
+          </a:prstGeom>
+          <a:noFill/>
+          <a:ln/>
+        </p:spPr>
+        <p:txBody>
+          <a:bodyPr wrap="square" lIns="0" tIns="0" rIns="0" bIns="0" rtlCol="0" anchor="ctr"/>
+          <a:lstStyle/>
+          <a:p>
+            <a:pPr indent="0" marL="0">
+              <a:buNone/>
+            </a:pPr>
+            <a:r>
+              <a:rPr lang="en-US" sz="1300" dirty="0">
+                <a:solidFill>
+                  <a:srgbClr val="3D4757"/>
+                </a:solidFill>
+              </a:rPr>
+              <a:t>沿两条路径挽回</a:t>
+            </a:r>
+            <a:endParaRPr lang="en-US" sz="1300" dirty="0"/>
+          </a:p>
+        </p:txBody>
+      </p:sp>
+      <p:sp>
+        <p:nvSpPr>
+          <p:cNvPr id="31" name="path-card-0"/>
+          <p:cNvSpPr/>
+          <p:nvPr/>
+        </p:nvSpPr>
+        <p:spPr>
+          <a:xfrm>
+            <a:off x="457200" y="4892040"/>
+            <a:ext cx="5486400" cy="1325880"/>
+          </a:xfrm>
+          <a:prstGeom prst="roundRect">
+            <a:avLst>
+              <a:gd name="adj" fmla="val 5517"/>
             </a:avLst>
           </a:prstGeom>
           <a:solidFill>
@@ -2409,13 +2535,13 @@
       </p:sp>
       <p:sp>
         <p:nvSpPr>
-          <p:cNvPr id="28" name="path-dot-0"/>
+          <p:cNvPr id="32" name="path-dot-0"/>
           <p:cNvSpPr/>
           <p:nvPr/>
         </p:nvSpPr>
         <p:spPr>
           <a:xfrm>
-            <a:off x="731520" y="4983480"/>
+            <a:off x="731520" y="5074920"/>
             <a:ext cx="457200" cy="457200"/>
           </a:xfrm>
           <a:prstGeom prst="ellipse">
@@ -2434,13 +2560,13 @@
       </p:sp>
       <p:sp>
         <p:nvSpPr>
-          <p:cNvPr id="29" name="path-num-0"/>
+          <p:cNvPr id="33" name="path-num-0"/>
           <p:cNvSpPr txBox="1"/>
           <p:nvPr/>
         </p:nvSpPr>
         <p:spPr>
           <a:xfrm>
-            <a:off x="731520" y="4983480"/>
+            <a:off x="731520" y="5074920"/>
             <a:ext cx="457200" cy="457200"/>
           </a:xfrm>
           <a:prstGeom prst="rect">
@@ -2470,13 +2596,13 @@
       </p:sp>
       <p:sp>
         <p:nvSpPr>
-          <p:cNvPr id="30" name="path-h-0"/>
+          <p:cNvPr id="34" name="path-h-0"/>
           <p:cNvSpPr txBox="1"/>
           <p:nvPr/>
         </p:nvSpPr>
         <p:spPr>
           <a:xfrm>
-            <a:off x="1371600" y="4983480"/>
+            <a:off x="1371600" y="5074920"/>
             <a:ext cx="4389120" cy="365760"/>
           </a:xfrm>
           <a:prstGeom prst="rect">
@@ -2506,14 +2632,14 @@
       </p:sp>
       <p:sp>
         <p:nvSpPr>
-          <p:cNvPr id="31" name="path-b-0"/>
+          <p:cNvPr id="35" name="path-b-0"/>
           <p:cNvSpPr txBox="1"/>
           <p:nvPr/>
         </p:nvSpPr>
         <p:spPr>
           <a:xfrm>
-            <a:off x="1371600" y="5394960"/>
-            <a:ext cx="4389120" cy="731520"/>
+            <a:off x="1371600" y="5486400"/>
+            <a:ext cx="4389120" cy="640080"/>
           </a:xfrm>
           <a:prstGeom prst="rect">
             <a:avLst/>
@@ -2542,18 +2668,18 @@
       </p:sp>
       <p:sp>
         <p:nvSpPr>
-          <p:cNvPr id="32" name="path-card-1"/>
+          <p:cNvPr id="36" name="path-card-1"/>
           <p:cNvSpPr/>
           <p:nvPr/>
         </p:nvSpPr>
         <p:spPr>
           <a:xfrm>
-            <a:off x="6245352" y="4800600"/>
-            <a:ext cx="5486400" cy="1417320"/>
+            <a:off x="6245352" y="4892040"/>
+            <a:ext cx="5486400" cy="1325880"/>
           </a:xfrm>
           <a:prstGeom prst="roundRect">
             <a:avLst>
-              <a:gd name="adj" fmla="val 5161"/>
+              <a:gd name="adj" fmla="val 5517"/>
             </a:avLst>
           </a:prstGeom>
           <a:solidFill>
@@ -2569,13 +2695,13 @@
       </p:sp>
       <p:sp>
         <p:nvSpPr>
-          <p:cNvPr id="33" name="path-dot-1"/>
+          <p:cNvPr id="37" name="path-dot-1"/>
           <p:cNvSpPr/>
           <p:nvPr/>
         </p:nvSpPr>
         <p:spPr>
           <a:xfrm>
-            <a:off x="6519672" y="4983480"/>
+            <a:off x="6519672" y="5074920"/>
             <a:ext cx="457200" cy="457200"/>
           </a:xfrm>
           <a:prstGeom prst="ellipse">
@@ -2594,13 +2720,13 @@
       </p:sp>
       <p:sp>
         <p:nvSpPr>
-          <p:cNvPr id="34" name="path-num-1"/>
+          <p:cNvPr id="38" name="path-num-1"/>
           <p:cNvSpPr txBox="1"/>
           <p:nvPr/>
         </p:nvSpPr>
         <p:spPr>
           <a:xfrm>
-            <a:off x="6519672" y="4983480"/>
+            <a:off x="6519672" y="5074920"/>
             <a:ext cx="457200" cy="457200"/>
           </a:xfrm>
           <a:prstGeom prst="rect">
@@ -2630,13 +2756,13 @@
       </p:sp>
       <p:sp>
         <p:nvSpPr>
-          <p:cNvPr id="35" name="path-h-1"/>
+          <p:cNvPr id="39" name="path-h-1"/>
           <p:cNvSpPr txBox="1"/>
           <p:nvPr/>
         </p:nvSpPr>
         <p:spPr>
           <a:xfrm>
-            <a:off x="7159752" y="4983480"/>
+            <a:off x="7159752" y="5074920"/>
             <a:ext cx="4389120" cy="365760"/>
           </a:xfrm>
           <a:prstGeom prst="rect">
@@ -2666,14 +2792,14 @@
       </p:sp>
       <p:sp>
         <p:nvSpPr>
-          <p:cNvPr id="36" name="path-b-1"/>
+          <p:cNvPr id="40" name="path-b-1"/>
           <p:cNvSpPr txBox="1"/>
           <p:nvPr/>
         </p:nvSpPr>
         <p:spPr>
           <a:xfrm>
-            <a:off x="7159752" y="5394960"/>
-            <a:ext cx="4389120" cy="731520"/>
+            <a:off x="7159752" y="5486400"/>
+            <a:ext cx="4389120" cy="640080"/>
           </a:xfrm>
           <a:prstGeom prst="rect">
             <a:avLst/>
@@ -2795,7 +2921,7 @@
                   <a:schemeClr val="tx1"/>
                 </a:solidFill>
               </a:rPr>
-              <a:t>在扣位之前让更多订单具备代付条件，进一步降低非支付宝订单数、提高大盘抢票成功率</a:t>
+              <a:t>低价产品引导支付宝 · 二期：在扣位之前让更多订单具备代付条件</a:t>
             </a:r>
             <a:endParaRPr lang="en-US" sz="1700" dirty="0"/>
           </a:p>
@@ -2803,17 +2929,19 @@
       </p:sp>
       <p:sp>
         <p:nvSpPr>
-          <p:cNvPr id="4" name="l-head-bg"/>
+          <p:cNvPr id="4" name="bg-chip"/>
           <p:cNvSpPr/>
           <p:nvPr/>
         </p:nvSpPr>
         <p:spPr>
           <a:xfrm>
-            <a:off x="457200" y="1508760"/>
-            <a:ext cx="4846320" cy="502920"/>
-          </a:xfrm>
-          <a:prstGeom prst="rect">
-            <a:avLst/>
+            <a:off x="457200" y="1554480"/>
+            <a:ext cx="713232" cy="329184"/>
+          </a:xfrm>
+          <a:prstGeom prst="roundRect">
+            <a:avLst>
+              <a:gd name="adj" fmla="val 16667"/>
+            </a:avLst>
           </a:prstGeom>
           <a:solidFill>
             <a:srgbClr val="287DFA"/>
@@ -2828,14 +2956,14 @@
       </p:sp>
       <p:sp>
         <p:nvSpPr>
-          <p:cNvPr id="5" name="l-head"/>
+          <p:cNvPr id="5" name="bg-chip-t"/>
           <p:cNvSpPr txBox="1"/>
           <p:nvPr/>
         </p:nvSpPr>
         <p:spPr>
           <a:xfrm>
-            <a:off x="457200" y="1508760"/>
-            <a:ext cx="4846320" cy="502920"/>
+            <a:off x="457200" y="1554480"/>
+            <a:ext cx="713232" cy="329184"/>
           </a:xfrm>
           <a:prstGeom prst="rect">
             <a:avLst/>
@@ -2851,84 +2979,48 @@
               <a:buNone/>
             </a:pPr>
             <a:r>
-              <a:rPr lang="en-US" sz="1700" b="1" dirty="0">
+              <a:rPr lang="en-US" sz="1300" b="1" dirty="0">
                 <a:solidFill>
                   <a:srgbClr val="FFFFFF"/>
                 </a:solidFill>
               </a:rPr>
-              <a:t>低价产品引导支付宝 · 二期</a:t>
-            </a:r>
-            <a:endParaRPr lang="en-US" sz="1700" dirty="0"/>
-          </a:p>
-        </p:txBody>
-      </p:sp>
-      <p:sp>
-        <p:nvSpPr>
-          <p:cNvPr id="6" name="l-k-0"/>
+              <a:t>背景</a:t>
+            </a:r>
+            <a:endParaRPr lang="en-US" sz="1300" dirty="0"/>
+          </a:p>
+        </p:txBody>
+      </p:sp>
+      <p:sp>
+        <p:nvSpPr>
+          <p:cNvPr id="6" name="bg-text"/>
           <p:cNvSpPr txBox="1"/>
           <p:nvPr/>
         </p:nvSpPr>
         <p:spPr>
           <a:xfrm>
-            <a:off x="548640" y="2194560"/>
-            <a:ext cx="731520" cy="530352"/>
-          </a:xfrm>
-          <a:prstGeom prst="rect">
-            <a:avLst/>
-          </a:prstGeom>
-          <a:noFill/>
-          <a:ln/>
-        </p:spPr>
-        <p:txBody>
-          <a:bodyPr wrap="square" lIns="0" tIns="0" rIns="0" bIns="0" rtlCol="0" anchor="ctr"/>
+            <a:off x="457200" y="1965960"/>
+            <a:ext cx="4937760" cy="777240"/>
+          </a:xfrm>
+          <a:prstGeom prst="rect">
+            <a:avLst/>
+          </a:prstGeom>
+          <a:noFill/>
+          <a:ln/>
+        </p:spPr>
+        <p:txBody>
+          <a:bodyPr wrap="square" lIns="0" tIns="0" rIns="0" bIns="0" rtlCol="0" anchor="t"/>
           <a:lstStyle/>
           <a:p>
             <a:pPr indent="0" marL="0">
               <a:buNone/>
             </a:pPr>
             <a:r>
-              <a:rPr lang="en-US" sz="1400" b="1" dirty="0">
-                <a:solidFill>
-                  <a:srgbClr val="15315E"/>
-                </a:solidFill>
-              </a:rPr>
-              <a:t>背景</a:t>
-            </a:r>
-            <a:endParaRPr lang="en-US" sz="1400" dirty="0"/>
-          </a:p>
-        </p:txBody>
-      </p:sp>
-      <p:sp>
-        <p:nvSpPr>
-          <p:cNvPr id="7" name="l-v-0"/>
-          <p:cNvSpPr txBox="1"/>
-          <p:nvPr/>
-        </p:nvSpPr>
-        <p:spPr>
-          <a:xfrm>
-            <a:off x="1325880" y="2194560"/>
-            <a:ext cx="3931920" cy="530352"/>
-          </a:xfrm>
-          <a:prstGeom prst="rect">
-            <a:avLst/>
-          </a:prstGeom>
-          <a:noFill/>
-          <a:ln/>
-        </p:spPr>
-        <p:txBody>
-          <a:bodyPr wrap="square" lIns="0" tIns="0" rIns="0" bIns="0" rtlCol="0" anchor="ctr"/>
-          <a:lstStyle/>
-          <a:p>
-            <a:pPr indent="0" marL="0">
-              <a:buNone/>
-            </a:pPr>
-            <a:r>
               <a:rPr lang="en-US" sz="1300" dirty="0">
                 <a:solidFill>
                   <a:srgbClr val="3D4757"/>
                 </a:solidFill>
               </a:rPr>
-              <a:t>一期在抢票中用低价产品吸引用户使用支付宝，但转化率较低</a:t>
+              <a:t>一期在抢票中用低价产品吸引用户使用支付宝，但转化率较低；需要进一步降低非支付宝订单数，提高大盘抢票成功率</a:t>
             </a:r>
             <a:endParaRPr lang="en-US" sz="1300" dirty="0"/>
           </a:p>
@@ -2936,90 +3028,180 @@
       </p:sp>
       <p:sp>
         <p:nvSpPr>
-          <p:cNvPr id="8" name="l-k-1"/>
-          <p:cNvSpPr txBox="1"/>
-          <p:nvPr/>
-        </p:nvSpPr>
-        <p:spPr>
-          <a:xfrm>
-            <a:off x="548640" y="2816352"/>
-            <a:ext cx="731520" cy="530352"/>
-          </a:xfrm>
-          <a:prstGeom prst="rect">
-            <a:avLst/>
-          </a:prstGeom>
-          <a:noFill/>
-          <a:ln/>
-        </p:spPr>
-        <p:txBody>
-          <a:bodyPr wrap="square" lIns="0" tIns="0" rIns="0" bIns="0" rtlCol="0" anchor="ctr"/>
-          <a:lstStyle/>
-          <a:p>
-            <a:pPr indent="0" marL="0">
-              <a:buNone/>
-            </a:pPr>
-            <a:r>
-              <a:rPr lang="en-US" sz="1400" b="1" dirty="0">
-                <a:solidFill>
-                  <a:srgbClr val="15315E"/>
-                </a:solidFill>
-              </a:rPr>
-              <a:t>做法</a:t>
-            </a:r>
-            <a:endParaRPr lang="en-US" sz="1400" dirty="0"/>
-          </a:p>
-        </p:txBody>
-      </p:sp>
-      <p:sp>
-        <p:nvSpPr>
-          <p:cNvPr id="9" name="l-v-1"/>
-          <p:cNvSpPr txBox="1"/>
-          <p:nvPr/>
-        </p:nvSpPr>
-        <p:spPr>
-          <a:xfrm>
-            <a:off x="1325880" y="2816352"/>
-            <a:ext cx="3931920" cy="530352"/>
-          </a:xfrm>
-          <a:prstGeom prst="rect">
-            <a:avLst/>
-          </a:prstGeom>
-          <a:noFill/>
-          <a:ln/>
-        </p:spPr>
-        <p:txBody>
-          <a:bodyPr wrap="square" lIns="0" tIns="0" rIns="0" bIns="0" rtlCol="0" anchor="ctr"/>
-          <a:lstStyle/>
-          <a:p>
-            <a:pPr indent="0" marL="0">
-              <a:buNone/>
-            </a:pPr>
-            <a:r>
-              <a:rPr lang="en-US" sz="1300" dirty="0">
-                <a:solidFill>
-                  <a:srgbClr val="3D4757"/>
-                </a:solidFill>
-              </a:rPr>
-              <a:t>扩大补贴范围：非支付宝订单可特惠升级托管，仅支持支付宝支付</a:t>
-            </a:r>
-            <a:endParaRPr lang="en-US" sz="1300" dirty="0"/>
-          </a:p>
-        </p:txBody>
-      </p:sp>
-      <p:sp>
-        <p:nvSpPr>
-          <p:cNvPr id="10" name="l-res-card"/>
+          <p:cNvPr id="7" name="st-chip"/>
           <p:cNvSpPr/>
           <p:nvPr/>
         </p:nvSpPr>
         <p:spPr>
           <a:xfrm>
-            <a:off x="457200" y="3611880"/>
-            <a:ext cx="4846320" cy="2606040"/>
+            <a:off x="457200" y="2880360"/>
+            <a:ext cx="713232" cy="329184"/>
           </a:xfrm>
           <a:prstGeom prst="roundRect">
             <a:avLst>
-              <a:gd name="adj" fmla="val 2807"/>
+              <a:gd name="adj" fmla="val 16667"/>
+            </a:avLst>
+          </a:prstGeom>
+          <a:solidFill>
+            <a:srgbClr val="287DFA"/>
+          </a:solidFill>
+          <a:ln w="12700">
+            <a:solidFill>
+              <a:srgbClr val="287DFA"/>
+            </a:solidFill>
+            <a:prstDash val="solid"/>
+          </a:ln>
+        </p:spPr>
+      </p:sp>
+      <p:sp>
+        <p:nvSpPr>
+          <p:cNvPr id="8" name="st-chip-t"/>
+          <p:cNvSpPr txBox="1"/>
+          <p:nvPr/>
+        </p:nvSpPr>
+        <p:spPr>
+          <a:xfrm>
+            <a:off x="457200" y="2880360"/>
+            <a:ext cx="713232" cy="329184"/>
+          </a:xfrm>
+          <a:prstGeom prst="rect">
+            <a:avLst/>
+          </a:prstGeom>
+          <a:noFill/>
+          <a:ln/>
+        </p:spPr>
+        <p:txBody>
+          <a:bodyPr wrap="square" lIns="0" tIns="0" rIns="0" bIns="0" rtlCol="0" anchor="ctr"/>
+          <a:lstStyle/>
+          <a:p>
+            <a:pPr algn="ctr" indent="0" marL="0">
+              <a:buNone/>
+            </a:pPr>
+            <a:r>
+              <a:rPr lang="en-US" sz="1300" b="1" dirty="0">
+                <a:solidFill>
+                  <a:srgbClr val="FFFFFF"/>
+                </a:solidFill>
+              </a:rPr>
+              <a:t>策略</a:t>
+            </a:r>
+            <a:endParaRPr lang="en-US" sz="1300" dirty="0"/>
+          </a:p>
+        </p:txBody>
+      </p:sp>
+      <p:sp>
+        <p:nvSpPr>
+          <p:cNvPr id="9" name="st-text"/>
+          <p:cNvSpPr txBox="1"/>
+          <p:nvPr/>
+        </p:nvSpPr>
+        <p:spPr>
+          <a:xfrm>
+            <a:off x="457200" y="3291840"/>
+            <a:ext cx="4937760" cy="594360"/>
+          </a:xfrm>
+          <a:prstGeom prst="rect">
+            <a:avLst/>
+          </a:prstGeom>
+          <a:noFill/>
+          <a:ln/>
+        </p:spPr>
+        <p:txBody>
+          <a:bodyPr wrap="square" lIns="0" tIns="0" rIns="0" bIns="0" rtlCol="0" anchor="t"/>
+          <a:lstStyle/>
+          <a:p>
+            <a:pPr indent="0" marL="0">
+              <a:buNone/>
+            </a:pPr>
+            <a:r>
+              <a:rPr lang="en-US" sz="1300" dirty="0">
+                <a:solidFill>
+                  <a:srgbClr val="3D4757"/>
+                </a:solidFill>
+              </a:rPr>
+              <a:t>扩大补贴范围：非支付宝订单可特惠升级托管，仅支持支付宝支付（见右侧截图）</a:t>
+            </a:r>
+            <a:endParaRPr lang="en-US" sz="1300" dirty="0"/>
+          </a:p>
+        </p:txBody>
+      </p:sp>
+      <p:sp>
+        <p:nvSpPr>
+          <p:cNvPr id="10" name="ef-chip"/>
+          <p:cNvSpPr/>
+          <p:nvPr/>
+        </p:nvSpPr>
+        <p:spPr>
+          <a:xfrm>
+            <a:off x="457200" y="4023360"/>
+            <a:ext cx="713232" cy="329184"/>
+          </a:xfrm>
+          <a:prstGeom prst="roundRect">
+            <a:avLst>
+              <a:gd name="adj" fmla="val 16667"/>
+            </a:avLst>
+          </a:prstGeom>
+          <a:solidFill>
+            <a:srgbClr val="287DFA"/>
+          </a:solidFill>
+          <a:ln w="12700">
+            <a:solidFill>
+              <a:srgbClr val="287DFA"/>
+            </a:solidFill>
+            <a:prstDash val="solid"/>
+          </a:ln>
+        </p:spPr>
+      </p:sp>
+      <p:sp>
+        <p:nvSpPr>
+          <p:cNvPr id="11" name="ef-chip-t"/>
+          <p:cNvSpPr txBox="1"/>
+          <p:nvPr/>
+        </p:nvSpPr>
+        <p:spPr>
+          <a:xfrm>
+            <a:off x="457200" y="4023360"/>
+            <a:ext cx="713232" cy="329184"/>
+          </a:xfrm>
+          <a:prstGeom prst="rect">
+            <a:avLst/>
+          </a:prstGeom>
+          <a:noFill/>
+          <a:ln/>
+        </p:spPr>
+        <p:txBody>
+          <a:bodyPr wrap="square" lIns="0" tIns="0" rIns="0" bIns="0" rtlCol="0" anchor="ctr"/>
+          <a:lstStyle/>
+          <a:p>
+            <a:pPr algn="ctr" indent="0" marL="0">
+              <a:buNone/>
+            </a:pPr>
+            <a:r>
+              <a:rPr lang="en-US" sz="1300" b="1" dirty="0">
+                <a:solidFill>
+                  <a:srgbClr val="FFFFFF"/>
+                </a:solidFill>
+              </a:rPr>
+              <a:t>效果</a:t>
+            </a:r>
+            <a:endParaRPr lang="en-US" sz="1300" dirty="0"/>
+          </a:p>
+        </p:txBody>
+      </p:sp>
+      <p:sp>
+        <p:nvSpPr>
+          <p:cNvPr id="12" name="ef-card"/>
+          <p:cNvSpPr/>
+          <p:nvPr/>
+        </p:nvSpPr>
+        <p:spPr>
+          <a:xfrm>
+            <a:off x="457200" y="4434840"/>
+            <a:ext cx="4937760" cy="1783080"/>
+          </a:xfrm>
+          <a:prstGeom prst="roundRect">
+            <a:avLst>
+              <a:gd name="adj" fmla="val 4103"/>
             </a:avLst>
           </a:prstGeom>
           <a:solidFill>
@@ -3035,35 +3217,35 @@
       </p:sp>
       <p:sp>
         <p:nvSpPr>
-          <p:cNvPr id="11" name="l-res-h"/>
+          <p:cNvPr id="13" name="kpi-t-l"/>
           <p:cNvSpPr txBox="1"/>
           <p:nvPr/>
         </p:nvSpPr>
         <p:spPr>
           <a:xfrm>
-            <a:off x="731520" y="3794760"/>
-            <a:ext cx="2743200" cy="274320"/>
-          </a:xfrm>
-          <a:prstGeom prst="rect">
-            <a:avLst/>
-          </a:prstGeom>
-          <a:noFill/>
-          <a:ln/>
-        </p:spPr>
-        <p:txBody>
-          <a:bodyPr wrap="square" lIns="0" tIns="0" rIns="0" bIns="0" rtlCol="0" anchor="t"/>
+            <a:off x="731520" y="4572000"/>
+            <a:ext cx="1737360" cy="640080"/>
+          </a:xfrm>
+          <a:prstGeom prst="rect">
+            <a:avLst/>
+          </a:prstGeom>
+          <a:noFill/>
+          <a:ln/>
+        </p:spPr>
+        <p:txBody>
+          <a:bodyPr wrap="square" lIns="0" tIns="0" rIns="0" bIns="0" rtlCol="0" anchor="ctr"/>
           <a:lstStyle/>
           <a:p>
             <a:pPr indent="0" marL="0">
               <a:buNone/>
             </a:pPr>
             <a:r>
-              <a:rPr lang="en-US" sz="1400" b="1" dirty="0">
-                <a:solidFill>
-                  <a:srgbClr val="287DFA"/>
-                </a:solidFill>
-              </a:rPr>
-              <a:t>效果（日均）</a:t>
+              <a:rPr lang="en-US" sz="1400" dirty="0">
+                <a:solidFill>
+                  <a:srgbClr val="3D4757"/>
+                </a:solidFill>
+              </a:rPr>
+              <a:t>日均目标订单数</a:t>
             </a:r>
             <a:endParaRPr lang="en-US" sz="1400" dirty="0"/>
           </a:p>
@@ -3071,14 +3253,14 @@
       </p:sp>
       <p:sp>
         <p:nvSpPr>
-          <p:cNvPr id="12" name="kpi-t-l"/>
+          <p:cNvPr id="14" name="kpi-t-v"/>
           <p:cNvSpPr txBox="1"/>
           <p:nvPr/>
         </p:nvSpPr>
         <p:spPr>
           <a:xfrm>
-            <a:off x="731520" y="4297680"/>
-            <a:ext cx="1463040" cy="640080"/>
+            <a:off x="2468880" y="4572000"/>
+            <a:ext cx="2743200" cy="640080"/>
           </a:xfrm>
           <a:prstGeom prst="rect">
             <a:avLst/>
@@ -3094,12 +3276,48 @@
               <a:buNone/>
             </a:pPr>
             <a:r>
+              <a:rPr lang="en-US" sz="2800" b="1" dirty="0">
+                <a:solidFill>
+                  <a:srgbClr val="15315E"/>
+                </a:solidFill>
+              </a:rPr>
+              <a:t>约 10,916 单</a:t>
+            </a:r>
+            <a:endParaRPr lang="en-US" sz="2800" dirty="0"/>
+          </a:p>
+        </p:txBody>
+      </p:sp>
+      <p:sp>
+        <p:nvSpPr>
+          <p:cNvPr id="15" name="kpi-c-l"/>
+          <p:cNvSpPr txBox="1"/>
+          <p:nvPr/>
+        </p:nvSpPr>
+        <p:spPr>
+          <a:xfrm>
+            <a:off x="731520" y="5394960"/>
+            <a:ext cx="1737360" cy="640080"/>
+          </a:xfrm>
+          <a:prstGeom prst="rect">
+            <a:avLst/>
+          </a:prstGeom>
+          <a:noFill/>
+          <a:ln/>
+        </p:spPr>
+        <p:txBody>
+          <a:bodyPr wrap="square" lIns="0" tIns="0" rIns="0" bIns="0" rtlCol="0" anchor="ctr"/>
+          <a:lstStyle/>
+          <a:p>
+            <a:pPr indent="0" marL="0">
+              <a:buNone/>
+            </a:pPr>
+            <a:r>
               <a:rPr lang="en-US" sz="1400" dirty="0">
                 <a:solidFill>
                   <a:srgbClr val="3D4757"/>
                 </a:solidFill>
               </a:rPr>
-              <a:t>目标订单数</a:t>
+              <a:t>日均转化订单数</a:t>
             </a:r>
             <a:endParaRPr lang="en-US" sz="1400" dirty="0"/>
           </a:p>
@@ -3107,86 +3325,14 @@
       </p:sp>
       <p:sp>
         <p:nvSpPr>
-          <p:cNvPr id="13" name="kpi-t-v"/>
+          <p:cNvPr id="16" name="kpi-c-v"/>
           <p:cNvSpPr txBox="1"/>
           <p:nvPr/>
         </p:nvSpPr>
         <p:spPr>
           <a:xfrm>
-            <a:off x="2194560" y="4297680"/>
-            <a:ext cx="2926080" cy="640080"/>
-          </a:xfrm>
-          <a:prstGeom prst="rect">
-            <a:avLst/>
-          </a:prstGeom>
-          <a:noFill/>
-          <a:ln/>
-        </p:spPr>
-        <p:txBody>
-          <a:bodyPr wrap="square" lIns="0" tIns="0" rIns="0" bIns="0" rtlCol="0" anchor="ctr"/>
-          <a:lstStyle/>
-          <a:p>
-            <a:pPr indent="0" marL="0">
-              <a:buNone/>
-            </a:pPr>
-            <a:r>
-              <a:rPr lang="en-US" sz="2800" b="1" dirty="0">
-                <a:solidFill>
-                  <a:srgbClr val="15315E"/>
-                </a:solidFill>
-              </a:rPr>
-              <a:t>约 10,916 单</a:t>
-            </a:r>
-            <a:endParaRPr lang="en-US" sz="2800" dirty="0"/>
-          </a:p>
-        </p:txBody>
-      </p:sp>
-      <p:sp>
-        <p:nvSpPr>
-          <p:cNvPr id="14" name="kpi-c-l"/>
-          <p:cNvSpPr txBox="1"/>
-          <p:nvPr/>
-        </p:nvSpPr>
-        <p:spPr>
-          <a:xfrm>
-            <a:off x="731520" y="5120640"/>
-            <a:ext cx="1463040" cy="640080"/>
-          </a:xfrm>
-          <a:prstGeom prst="rect">
-            <a:avLst/>
-          </a:prstGeom>
-          <a:noFill/>
-          <a:ln/>
-        </p:spPr>
-        <p:txBody>
-          <a:bodyPr wrap="square" lIns="0" tIns="0" rIns="0" bIns="0" rtlCol="0" anchor="ctr"/>
-          <a:lstStyle/>
-          <a:p>
-            <a:pPr indent="0" marL="0">
-              <a:buNone/>
-            </a:pPr>
-            <a:r>
-              <a:rPr lang="en-US" sz="1400" dirty="0">
-                <a:solidFill>
-                  <a:srgbClr val="3D4757"/>
-                </a:solidFill>
-              </a:rPr>
-              <a:t>转化订单数</a:t>
-            </a:r>
-            <a:endParaRPr lang="en-US" sz="1400" dirty="0"/>
-          </a:p>
-        </p:txBody>
-      </p:sp>
-      <p:sp>
-        <p:nvSpPr>
-          <p:cNvPr id="15" name="kpi-c-v"/>
-          <p:cNvSpPr txBox="1"/>
-          <p:nvPr/>
-        </p:nvSpPr>
-        <p:spPr>
-          <a:xfrm>
-            <a:off x="2194560" y="5120640"/>
-            <a:ext cx="2926080" cy="640080"/>
+            <a:off x="2468880" y="5394960"/>
+            <a:ext cx="2743200" cy="640080"/>
           </a:xfrm>
           <a:prstGeom prst="rect">
             <a:avLst/>
@@ -3215,7 +3361,7 @@
       </p:sp>
       <p:pic>
         <p:nvPicPr>
-          <p:cNvPr id="16" name="shot-0" descr="① 特惠浮窗：非支付宝订单特惠升级托管">    </p:cNvPr>
+          <p:cNvPr id="17" name="shot-0" descr="① 特惠浮窗：非支付宝订单特惠升级">    </p:cNvPr>
           <p:cNvPicPr>
             <a:picLocks noChangeAspect="1"/>
           </p:cNvPicPr>
@@ -3229,7 +3375,7 @@
         </p:blipFill>
         <p:spPr>
           <a:xfrm>
-            <a:off x="5715000" y="1508760"/>
+            <a:off x="5760720" y="1554480"/>
             <a:ext cx="1691640" cy="3718475"/>
           </a:xfrm>
           <a:prstGeom prst="rect">
@@ -3239,13 +3385,13 @@
       </p:pic>
       <p:sp>
         <p:nvSpPr>
-          <p:cNvPr id="17" name="shot-frame-0"/>
+          <p:cNvPr id="18" name="shot-frame-0"/>
           <p:cNvSpPr/>
           <p:nvPr/>
         </p:nvSpPr>
         <p:spPr>
           <a:xfrm>
-            <a:off x="5715000" y="1508760"/>
+            <a:off x="5760720" y="1554480"/>
             <a:ext cx="1691640" cy="3718475"/>
           </a:xfrm>
           <a:prstGeom prst="rect">
@@ -3266,14 +3412,14 @@
       </p:sp>
       <p:sp>
         <p:nvSpPr>
-          <p:cNvPr id="18" name="shot-cap-0"/>
+          <p:cNvPr id="19" name="shot-cap-0"/>
           <p:cNvSpPr txBox="1"/>
           <p:nvPr/>
         </p:nvSpPr>
         <p:spPr>
           <a:xfrm>
-            <a:off x="5623560" y="5318675"/>
-            <a:ext cx="1874520" cy="548640"/>
+            <a:off x="5623560" y="5364395"/>
+            <a:ext cx="1965960" cy="548640"/>
           </a:xfrm>
           <a:prstGeom prst="rect">
             <a:avLst/>
@@ -3308,7 +3454,7 @@
                   <a:srgbClr val="3D4757"/>
                 </a:solidFill>
               </a:rPr>
-              <a:t>非支付宝订单特惠升级托管</a:t>
+              <a:t>非支付宝订单特惠升级</a:t>
             </a:r>
             <a:endParaRPr lang="en-US" sz="1200" dirty="0"/>
           </a:p>
@@ -3316,7 +3462,7 @@
       </p:sp>
       <p:pic>
         <p:nvPicPr>
-          <p:cNvPr id="19" name="shot-1" descr="② 托管等级页：展示限时特惠价">    </p:cNvPr>
+          <p:cNvPr id="20" name="shot-1" descr="② 托管等级页：展示限时特惠价">    </p:cNvPr>
           <p:cNvPicPr>
             <a:picLocks noChangeAspect="1"/>
           </p:cNvPicPr>
@@ -3330,7 +3476,7 @@
         </p:blipFill>
         <p:spPr>
           <a:xfrm>
-            <a:off x="7772400" y="1508760"/>
+            <a:off x="7772400" y="1554480"/>
             <a:ext cx="1691640" cy="3718475"/>
           </a:xfrm>
           <a:prstGeom prst="rect">
@@ -3340,13 +3486,13 @@
       </p:pic>
       <p:sp>
         <p:nvSpPr>
-          <p:cNvPr id="20" name="shot-frame-1"/>
+          <p:cNvPr id="21" name="shot-frame-1"/>
           <p:cNvSpPr/>
           <p:nvPr/>
         </p:nvSpPr>
         <p:spPr>
           <a:xfrm>
-            <a:off x="7772400" y="1508760"/>
+            <a:off x="7772400" y="1554480"/>
             <a:ext cx="1691640" cy="3718475"/>
           </a:xfrm>
           <a:prstGeom prst="rect">
@@ -3367,14 +3513,14 @@
       </p:sp>
       <p:sp>
         <p:nvSpPr>
-          <p:cNvPr id="21" name="shot-cap-1"/>
+          <p:cNvPr id="22" name="shot-cap-1"/>
           <p:cNvSpPr txBox="1"/>
           <p:nvPr/>
         </p:nvSpPr>
         <p:spPr>
           <a:xfrm>
-            <a:off x="7680960" y="5318675"/>
-            <a:ext cx="1874520" cy="548640"/>
+            <a:off x="7635240" y="5364395"/>
+            <a:ext cx="1965960" cy="548640"/>
           </a:xfrm>
           <a:prstGeom prst="rect">
             <a:avLst/>
@@ -3417,7 +3563,7 @@
       </p:sp>
       <p:pic>
         <p:nvPicPr>
-          <p:cNvPr id="22" name="shot-2" descr="③ 收银台：仅保留支付宝支付">    </p:cNvPr>
+          <p:cNvPr id="23" name="shot-2" descr="③ 收银台：仅保留支付宝支付">    </p:cNvPr>
           <p:cNvPicPr>
             <a:picLocks noChangeAspect="1"/>
           </p:cNvPicPr>
@@ -3431,7 +3577,7 @@
         </p:blipFill>
         <p:spPr>
           <a:xfrm>
-            <a:off x="9829800" y="1508760"/>
+            <a:off x="9784080" y="1554480"/>
             <a:ext cx="1691640" cy="3718475"/>
           </a:xfrm>
           <a:prstGeom prst="rect">
@@ -3441,13 +3587,13 @@
       </p:pic>
       <p:sp>
         <p:nvSpPr>
-          <p:cNvPr id="23" name="shot-frame-2"/>
+          <p:cNvPr id="24" name="shot-frame-2"/>
           <p:cNvSpPr/>
           <p:nvPr/>
         </p:nvSpPr>
         <p:spPr>
           <a:xfrm>
-            <a:off x="9829800" y="1508760"/>
+            <a:off x="9784080" y="1554480"/>
             <a:ext cx="1691640" cy="3718475"/>
           </a:xfrm>
           <a:prstGeom prst="rect">
@@ -3468,14 +3614,14 @@
       </p:sp>
       <p:sp>
         <p:nvSpPr>
-          <p:cNvPr id="24" name="shot-cap-2"/>
+          <p:cNvPr id="25" name="shot-cap-2"/>
           <p:cNvSpPr txBox="1"/>
           <p:nvPr/>
         </p:nvSpPr>
         <p:spPr>
           <a:xfrm>
-            <a:off x="9738360" y="5318675"/>
-            <a:ext cx="1874520" cy="548640"/>
+            <a:off x="9646920" y="5364395"/>
+            <a:ext cx="1965960" cy="548640"/>
           </a:xfrm>
           <a:prstGeom prst="rect">
             <a:avLst/>
@@ -3611,7 +3757,7 @@
                   <a:schemeClr val="tx1"/>
                 </a:solidFill>
               </a:rPr>
-              <a:t>4 月主流程直付改造后，覆盖遗留的长尾场景：在原本就需要用户确认的节点接直付</a:t>
+              <a:t>覆盖 4 月主流程直付改造后遗留的长尾场景</a:t>
             </a:r>
             <a:endParaRPr lang="en-US" sz="1700" dirty="0"/>
           </a:p>
@@ -3619,200 +3765,19 @@
       </p:sp>
       <p:sp>
         <p:nvSpPr>
-          <p:cNvPr id="4" name="idea-head"/>
-          <p:cNvSpPr txBox="1"/>
-          <p:nvPr/>
-        </p:nvSpPr>
-        <p:spPr>
-          <a:xfrm>
-            <a:off x="457200" y="1508760"/>
-            <a:ext cx="5486400" cy="320040"/>
-          </a:xfrm>
-          <a:prstGeom prst="rect">
-            <a:avLst/>
-          </a:prstGeom>
-          <a:noFill/>
-          <a:ln/>
-        </p:spPr>
-        <p:txBody>
-          <a:bodyPr wrap="square" lIns="0" tIns="0" rIns="0" bIns="0" rtlCol="0" anchor="t"/>
-          <a:lstStyle/>
-          <a:p>
-            <a:pPr indent="0" marL="0">
-              <a:buNone/>
-            </a:pPr>
-            <a:r>
-              <a:rPr lang="en-US" sz="1600" b="1" dirty="0">
-                <a:solidFill>
-                  <a:srgbClr val="287DFA"/>
-                </a:solidFill>
-              </a:rPr>
-              <a:t>思路</a:t>
-            </a:r>
-            <a:endParaRPr lang="en-US" sz="1600" dirty="0"/>
-          </a:p>
-        </p:txBody>
-      </p:sp>
-      <p:sp>
-        <p:nvSpPr>
-          <p:cNvPr id="5" name="idea-card"/>
+          <p:cNvPr id="4" name="bg-chip"/>
           <p:cNvSpPr/>
           <p:nvPr/>
         </p:nvSpPr>
         <p:spPr>
           <a:xfrm>
-            <a:off x="457200" y="1874520"/>
-            <a:ext cx="5486400" cy="1417320"/>
+            <a:off x="457200" y="1554480"/>
+            <a:ext cx="713232" cy="329184"/>
           </a:xfrm>
           <a:prstGeom prst="roundRect">
             <a:avLst>
-              <a:gd name="adj" fmla="val 5161"/>
+              <a:gd name="adj" fmla="val 16667"/>
             </a:avLst>
-          </a:prstGeom>
-          <a:solidFill>
-            <a:srgbClr val="EEF4FF"/>
-          </a:solidFill>
-          <a:ln w="12700">
-            <a:solidFill>
-              <a:srgbClr val="EEF4FF"/>
-            </a:solidFill>
-            <a:prstDash val="solid"/>
-          </a:ln>
-        </p:spPr>
-      </p:sp>
-      <p:sp>
-        <p:nvSpPr>
-          <p:cNvPr id="6" name="idea-text"/>
-          <p:cNvSpPr txBox="1"/>
-          <p:nvPr/>
-        </p:nvSpPr>
-        <p:spPr>
-          <a:xfrm>
-            <a:off x="685800" y="1965960"/>
-            <a:ext cx="5120640" cy="1234440"/>
-          </a:xfrm>
-          <a:prstGeom prst="rect">
-            <a:avLst/>
-          </a:prstGeom>
-          <a:noFill/>
-          <a:ln/>
-        </p:spPr>
-        <p:txBody>
-          <a:bodyPr wrap="square" lIns="0" tIns="0" rIns="0" bIns="0" rtlCol="0" anchor="ctr"/>
-          <a:lstStyle/>
-          <a:p>
-            <a:pPr indent="0" marL="0">
-              <a:spcAft>
-                <a:spcPts val="800"/>
-              </a:spcAft>
-              <a:buNone/>
-            </a:pPr>
-            <a:r>
-              <a:rPr lang="en-US" sz="1350" b="1" dirty="0">
-                <a:solidFill>
-                  <a:srgbClr val="15315E"/>
-                </a:solidFill>
-              </a:rPr>
-              <a:t>直付的成本和主要痛点：</a:t>
-            </a:r>
-            <a:pPr indent="0" marL="0">
-              <a:spcAft>
-                <a:spcPts val="800"/>
-              </a:spcAft>
-              <a:buNone/>
-            </a:pPr>
-            <a:r>
-              <a:rPr lang="en-US" sz="1350" dirty="0">
-                <a:solidFill>
-                  <a:srgbClr val="3D4757"/>
-                </a:solidFill>
-              </a:rPr>
-              <a:t>召回用户的过程中存在流失漏斗</a:t>
-            </a:r>
-            <a:endParaRPr lang="en-US" sz="1350" dirty="0"/>
-          </a:p>
-          <a:p>
-            <a:pPr indent="0" marL="0">
-              <a:spcAft>
-                <a:spcPts val="800"/>
-              </a:spcAft>
-              <a:buNone/>
-            </a:pPr>
-            <a:r>
-              <a:rPr lang="en-US" sz="1350" b="1" dirty="0">
-                <a:solidFill>
-                  <a:srgbClr val="15315E"/>
-                </a:solidFill>
-              </a:rPr>
-              <a:t>因此：</a:t>
-            </a:r>
-            <a:pPr indent="0" marL="0">
-              <a:spcAft>
-                <a:spcPts val="800"/>
-              </a:spcAft>
-              <a:buNone/>
-            </a:pPr>
-            <a:r>
-              <a:rPr lang="en-US" sz="1350" dirty="0">
-                <a:solidFill>
-                  <a:srgbClr val="3D4757"/>
-                </a:solidFill>
-              </a:rPr>
-              <a:t>优先在原本就需要用户确认的节点接直付，不额外增加召回</a:t>
-            </a:r>
-            <a:endParaRPr lang="en-US" sz="1350" dirty="0"/>
-          </a:p>
-        </p:txBody>
-      </p:sp>
-      <p:sp>
-        <p:nvSpPr>
-          <p:cNvPr id="7" name="scn-head"/>
-          <p:cNvSpPr txBox="1"/>
-          <p:nvPr/>
-        </p:nvSpPr>
-        <p:spPr>
-          <a:xfrm>
-            <a:off x="457200" y="3520440"/>
-            <a:ext cx="5486400" cy="320040"/>
-          </a:xfrm>
-          <a:prstGeom prst="rect">
-            <a:avLst/>
-          </a:prstGeom>
-          <a:noFill/>
-          <a:ln/>
-        </p:spPr>
-        <p:txBody>
-          <a:bodyPr wrap="square" lIns="0" tIns="0" rIns="0" bIns="0" rtlCol="0" anchor="t"/>
-          <a:lstStyle/>
-          <a:p>
-            <a:pPr indent="0" marL="0">
-              <a:buNone/>
-            </a:pPr>
-            <a:r>
-              <a:rPr lang="en-US" sz="1600" b="1" dirty="0">
-                <a:solidFill>
-                  <a:srgbClr val="287DFA"/>
-                </a:solidFill>
-              </a:rPr>
-              <a:t>8 月直付改造的场景</a:t>
-            </a:r>
-            <a:endParaRPr lang="en-US" sz="1600" dirty="0"/>
-          </a:p>
-        </p:txBody>
-      </p:sp>
-      <p:sp>
-        <p:nvSpPr>
-          <p:cNvPr id="8" name="scn-dot-0"/>
-          <p:cNvSpPr/>
-          <p:nvPr/>
-        </p:nvSpPr>
-        <p:spPr>
-          <a:xfrm>
-            <a:off x="502920" y="3977640"/>
-            <a:ext cx="411480" cy="411480"/>
-          </a:xfrm>
-          <a:prstGeom prst="ellipse">
-            <a:avLst/>
           </a:prstGeom>
           <a:solidFill>
             <a:srgbClr val="287DFA"/>
@@ -3827,14 +3792,14 @@
       </p:sp>
       <p:sp>
         <p:nvSpPr>
-          <p:cNvPr id="9" name="scn-num-0"/>
+          <p:cNvPr id="5" name="bg-chip-t"/>
           <p:cNvSpPr txBox="1"/>
           <p:nvPr/>
         </p:nvSpPr>
         <p:spPr>
           <a:xfrm>
-            <a:off x="502920" y="3977640"/>
-            <a:ext cx="411480" cy="411480"/>
+            <a:off x="457200" y="1554480"/>
+            <a:ext cx="713232" cy="329184"/>
           </a:xfrm>
           <a:prstGeom prst="rect">
             <a:avLst/>
@@ -3850,102 +3815,68 @@
               <a:buNone/>
             </a:pPr>
             <a:r>
-              <a:rPr lang="en-US" sz="1400" b="1" dirty="0">
+              <a:rPr lang="en-US" sz="1300" b="1" dirty="0">
                 <a:solidFill>
                   <a:srgbClr val="FFFFFF"/>
                 </a:solidFill>
               </a:rPr>
-              <a:t>1</a:t>
-            </a:r>
-            <a:endParaRPr lang="en-US" sz="1400" dirty="0"/>
-          </a:p>
-        </p:txBody>
-      </p:sp>
-      <p:sp>
-        <p:nvSpPr>
-          <p:cNvPr id="10" name="scn-k-0"/>
+              <a:t>背景</a:t>
+            </a:r>
+            <a:endParaRPr lang="en-US" sz="1300" dirty="0"/>
+          </a:p>
+        </p:txBody>
+      </p:sp>
+      <p:sp>
+        <p:nvSpPr>
+          <p:cNvPr id="6" name="bg-text"/>
           <p:cNvSpPr txBox="1"/>
           <p:nvPr/>
         </p:nvSpPr>
         <p:spPr>
           <a:xfrm>
-            <a:off x="1097280" y="3931920"/>
-            <a:ext cx="1554480" cy="502920"/>
-          </a:xfrm>
-          <a:prstGeom prst="rect">
-            <a:avLst/>
-          </a:prstGeom>
-          <a:noFill/>
-          <a:ln/>
-        </p:spPr>
-        <p:txBody>
-          <a:bodyPr wrap="square" lIns="0" tIns="0" rIns="0" bIns="0" rtlCol="0" anchor="ctr"/>
+            <a:off x="457200" y="1965960"/>
+            <a:ext cx="5486400" cy="685800"/>
+          </a:xfrm>
+          <a:prstGeom prst="rect">
+            <a:avLst/>
+          </a:prstGeom>
+          <a:noFill/>
+          <a:ln/>
+        </p:spPr>
+        <p:txBody>
+          <a:bodyPr wrap="square" lIns="0" tIns="0" rIns="0" bIns="0" rtlCol="0" anchor="t"/>
           <a:lstStyle/>
           <a:p>
             <a:pPr indent="0" marL="0">
               <a:buNone/>
             </a:pPr>
             <a:r>
-              <a:rPr lang="en-US" sz="1400" b="1" dirty="0">
-                <a:solidFill>
-                  <a:srgbClr val="15315E"/>
-                </a:solidFill>
-              </a:rPr>
-              <a:t>智能第二程</a:t>
-            </a:r>
-            <a:endParaRPr lang="en-US" sz="1400" dirty="0"/>
-          </a:p>
-        </p:txBody>
-      </p:sp>
-      <p:sp>
-        <p:nvSpPr>
-          <p:cNvPr id="11" name="scn-v-0"/>
-          <p:cNvSpPr txBox="1"/>
-          <p:nvPr/>
-        </p:nvSpPr>
-        <p:spPr>
-          <a:xfrm>
-            <a:off x="2651760" y="3931920"/>
-            <a:ext cx="3291840" cy="502920"/>
-          </a:xfrm>
-          <a:prstGeom prst="rect">
-            <a:avLst/>
-          </a:prstGeom>
-          <a:noFill/>
-          <a:ln/>
-        </p:spPr>
-        <p:txBody>
-          <a:bodyPr wrap="square" lIns="0" tIns="0" rIns="0" bIns="0" rtlCol="0" anchor="ctr"/>
-          <a:lstStyle/>
-          <a:p>
-            <a:pPr indent="0" marL="0">
-              <a:buNone/>
-            </a:pPr>
-            <a:r>
-              <a:rPr lang="en-US" sz="1250" dirty="0">
+              <a:rPr lang="en-US" sz="1300" dirty="0">
                 <a:solidFill>
                   <a:srgbClr val="3D4757"/>
                 </a:solidFill>
               </a:rPr>
-              <a:t>用户确认第二程方案后，由代付改为直付</a:t>
-            </a:r>
-            <a:endParaRPr lang="en-US" sz="1250" dirty="0"/>
-          </a:p>
-        </p:txBody>
-      </p:sp>
-      <p:sp>
-        <p:nvSpPr>
-          <p:cNvPr id="12" name="scn-dot-1"/>
+              <a:t>4 月主流程直付改造后，仍有长尾场景无法出票；直付的成本和主要痛点在于召回用户过程中的流失漏斗</a:t>
+            </a:r>
+            <a:endParaRPr lang="en-US" sz="1300" dirty="0"/>
+          </a:p>
+        </p:txBody>
+      </p:sp>
+      <p:sp>
+        <p:nvSpPr>
+          <p:cNvPr id="7" name="st-chip"/>
           <p:cNvSpPr/>
           <p:nvPr/>
         </p:nvSpPr>
         <p:spPr>
           <a:xfrm>
-            <a:off x="502920" y="4636008"/>
-            <a:ext cx="411480" cy="411480"/>
-          </a:xfrm>
-          <a:prstGeom prst="ellipse">
-            <a:avLst/>
+            <a:off x="457200" y="2788920"/>
+            <a:ext cx="713232" cy="329184"/>
+          </a:xfrm>
+          <a:prstGeom prst="roundRect">
+            <a:avLst>
+              <a:gd name="adj" fmla="val 16667"/>
+            </a:avLst>
           </a:prstGeom>
           <a:solidFill>
             <a:srgbClr val="287DFA"/>
@@ -3960,14 +3891,14 @@
       </p:sp>
       <p:sp>
         <p:nvSpPr>
-          <p:cNvPr id="13" name="scn-num-1"/>
+          <p:cNvPr id="8" name="st-chip-t"/>
           <p:cNvSpPr txBox="1"/>
           <p:nvPr/>
         </p:nvSpPr>
         <p:spPr>
           <a:xfrm>
-            <a:off x="502920" y="4636008"/>
-            <a:ext cx="411480" cy="411480"/>
+            <a:off x="457200" y="2788920"/>
+            <a:ext cx="713232" cy="329184"/>
           </a:xfrm>
           <a:prstGeom prst="rect">
             <a:avLst/>
@@ -3983,27 +3914,293 @@
               <a:buNone/>
             </a:pPr>
             <a:r>
+              <a:rPr lang="en-US" sz="1300" b="1" dirty="0">
+                <a:solidFill>
+                  <a:srgbClr val="FFFFFF"/>
+                </a:solidFill>
+              </a:rPr>
+              <a:t>策略</a:t>
+            </a:r>
+            <a:endParaRPr lang="en-US" sz="1300" dirty="0"/>
+          </a:p>
+        </p:txBody>
+      </p:sp>
+      <p:sp>
+        <p:nvSpPr>
+          <p:cNvPr id="9" name="st-text"/>
+          <p:cNvSpPr txBox="1"/>
+          <p:nvPr/>
+        </p:nvSpPr>
+        <p:spPr>
+          <a:xfrm>
+            <a:off x="457200" y="3200400"/>
+            <a:ext cx="5486400" cy="365760"/>
+          </a:xfrm>
+          <a:prstGeom prst="rect">
+            <a:avLst/>
+          </a:prstGeom>
+          <a:noFill/>
+          <a:ln/>
+        </p:spPr>
+        <p:txBody>
+          <a:bodyPr wrap="square" lIns="0" tIns="0" rIns="0" bIns="0" rtlCol="0" anchor="t"/>
+          <a:lstStyle/>
+          <a:p>
+            <a:pPr indent="0" marL="0">
+              <a:buNone/>
+            </a:pPr>
+            <a:r>
+              <a:rPr lang="en-US" sz="1300" dirty="0">
+                <a:solidFill>
+                  <a:srgbClr val="3D4757"/>
+                </a:solidFill>
+              </a:rPr>
+              <a:t>在原本就需要用户确认的节点接直付，8 月完成以下场景改造：</a:t>
+            </a:r>
+            <a:endParaRPr lang="en-US" sz="1300" dirty="0"/>
+          </a:p>
+        </p:txBody>
+      </p:sp>
+      <p:sp>
+        <p:nvSpPr>
+          <p:cNvPr id="10" name="scn-dot-0"/>
+          <p:cNvSpPr/>
+          <p:nvPr/>
+        </p:nvSpPr>
+        <p:spPr>
+          <a:xfrm>
+            <a:off x="502920" y="3712464"/>
+            <a:ext cx="365760" cy="365760"/>
+          </a:xfrm>
+          <a:prstGeom prst="ellipse">
+            <a:avLst/>
+          </a:prstGeom>
+          <a:solidFill>
+            <a:srgbClr val="8FB8F5"/>
+          </a:solidFill>
+          <a:ln w="12700">
+            <a:solidFill>
+              <a:srgbClr val="8FB8F5"/>
+            </a:solidFill>
+            <a:prstDash val="solid"/>
+          </a:ln>
+        </p:spPr>
+      </p:sp>
+      <p:sp>
+        <p:nvSpPr>
+          <p:cNvPr id="11" name="scn-num-0"/>
+          <p:cNvSpPr txBox="1"/>
+          <p:nvPr/>
+        </p:nvSpPr>
+        <p:spPr>
+          <a:xfrm>
+            <a:off x="502920" y="3712464"/>
+            <a:ext cx="365760" cy="365760"/>
+          </a:xfrm>
+          <a:prstGeom prst="rect">
+            <a:avLst/>
+          </a:prstGeom>
+          <a:noFill/>
+          <a:ln/>
+        </p:spPr>
+        <p:txBody>
+          <a:bodyPr wrap="square" lIns="0" tIns="0" rIns="0" bIns="0" rtlCol="0" anchor="ctr"/>
+          <a:lstStyle/>
+          <a:p>
+            <a:pPr algn="ctr" indent="0" marL="0">
+              <a:buNone/>
+            </a:pPr>
+            <a:r>
+              <a:rPr lang="en-US" sz="1300" b="1" dirty="0">
+                <a:solidFill>
+                  <a:srgbClr val="FFFFFF"/>
+                </a:solidFill>
+              </a:rPr>
+              <a:t>1</a:t>
+            </a:r>
+            <a:endParaRPr lang="en-US" sz="1300" dirty="0"/>
+          </a:p>
+        </p:txBody>
+      </p:sp>
+      <p:sp>
+        <p:nvSpPr>
+          <p:cNvPr id="12" name="scn-k-0"/>
+          <p:cNvSpPr txBox="1"/>
+          <p:nvPr/>
+        </p:nvSpPr>
+        <p:spPr>
+          <a:xfrm>
+            <a:off x="1005840" y="3657600"/>
+            <a:ext cx="1463040" cy="475488"/>
+          </a:xfrm>
+          <a:prstGeom prst="rect">
+            <a:avLst/>
+          </a:prstGeom>
+          <a:noFill/>
+          <a:ln/>
+        </p:spPr>
+        <p:txBody>
+          <a:bodyPr wrap="square" lIns="0" tIns="0" rIns="0" bIns="0" rtlCol="0" anchor="ctr"/>
+          <a:lstStyle/>
+          <a:p>
+            <a:pPr indent="0" marL="0">
+              <a:buNone/>
+            </a:pPr>
+            <a:r>
               <a:rPr lang="en-US" sz="1400" b="1" dirty="0">
                 <a:solidFill>
+                  <a:srgbClr val="15315E"/>
+                </a:solidFill>
+              </a:rPr>
+              <a:t>智能第二程</a:t>
+            </a:r>
+            <a:endParaRPr lang="en-US" sz="1400" dirty="0"/>
+          </a:p>
+        </p:txBody>
+      </p:sp>
+      <p:sp>
+        <p:nvSpPr>
+          <p:cNvPr id="13" name="scn-v-0"/>
+          <p:cNvSpPr txBox="1"/>
+          <p:nvPr/>
+        </p:nvSpPr>
+        <p:spPr>
+          <a:xfrm>
+            <a:off x="2468880" y="3657600"/>
+            <a:ext cx="3474720" cy="475488"/>
+          </a:xfrm>
+          <a:prstGeom prst="rect">
+            <a:avLst/>
+          </a:prstGeom>
+          <a:noFill/>
+          <a:ln/>
+        </p:spPr>
+        <p:txBody>
+          <a:bodyPr wrap="square" lIns="0" tIns="0" rIns="0" bIns="0" rtlCol="0" anchor="ctr"/>
+          <a:lstStyle/>
+          <a:p>
+            <a:pPr indent="0" marL="0">
+              <a:buNone/>
+            </a:pPr>
+            <a:r>
+              <a:rPr lang="en-US" sz="1250" dirty="0">
+                <a:solidFill>
+                  <a:srgbClr val="3D4757"/>
+                </a:solidFill>
+              </a:rPr>
+              <a:t>用户确认第二程方案后，由代付改为直付</a:t>
+            </a:r>
+            <a:endParaRPr lang="en-US" sz="1250" dirty="0"/>
+          </a:p>
+        </p:txBody>
+      </p:sp>
+      <p:sp>
+        <p:nvSpPr>
+          <p:cNvPr id="14" name="scn-dot-1"/>
+          <p:cNvSpPr/>
+          <p:nvPr/>
+        </p:nvSpPr>
+        <p:spPr>
+          <a:xfrm>
+            <a:off x="502920" y="4261104"/>
+            <a:ext cx="365760" cy="365760"/>
+          </a:xfrm>
+          <a:prstGeom prst="ellipse">
+            <a:avLst/>
+          </a:prstGeom>
+          <a:solidFill>
+            <a:srgbClr val="8FB8F5"/>
+          </a:solidFill>
+          <a:ln w="12700">
+            <a:solidFill>
+              <a:srgbClr val="8FB8F5"/>
+            </a:solidFill>
+            <a:prstDash val="solid"/>
+          </a:ln>
+        </p:spPr>
+      </p:sp>
+      <p:sp>
+        <p:nvSpPr>
+          <p:cNvPr id="15" name="scn-num-1"/>
+          <p:cNvSpPr txBox="1"/>
+          <p:nvPr/>
+        </p:nvSpPr>
+        <p:spPr>
+          <a:xfrm>
+            <a:off x="502920" y="4261104"/>
+            <a:ext cx="365760" cy="365760"/>
+          </a:xfrm>
+          <a:prstGeom prst="rect">
+            <a:avLst/>
+          </a:prstGeom>
+          <a:noFill/>
+          <a:ln/>
+        </p:spPr>
+        <p:txBody>
+          <a:bodyPr wrap="square" lIns="0" tIns="0" rIns="0" bIns="0" rtlCol="0" anchor="ctr"/>
+          <a:lstStyle/>
+          <a:p>
+            <a:pPr algn="ctr" indent="0" marL="0">
+              <a:buNone/>
+            </a:pPr>
+            <a:r>
+              <a:rPr lang="en-US" sz="1300" b="1" dirty="0">
+                <a:solidFill>
                   <a:srgbClr val="FFFFFF"/>
                 </a:solidFill>
               </a:rPr>
               <a:t>2</a:t>
             </a:r>
+            <a:endParaRPr lang="en-US" sz="1300" dirty="0"/>
+          </a:p>
+        </p:txBody>
+      </p:sp>
+      <p:sp>
+        <p:nvSpPr>
+          <p:cNvPr id="16" name="scn-k-1"/>
+          <p:cNvSpPr txBox="1"/>
+          <p:nvPr/>
+        </p:nvSpPr>
+        <p:spPr>
+          <a:xfrm>
+            <a:off x="1005840" y="4206240"/>
+            <a:ext cx="1463040" cy="475488"/>
+          </a:xfrm>
+          <a:prstGeom prst="rect">
+            <a:avLst/>
+          </a:prstGeom>
+          <a:noFill/>
+          <a:ln/>
+        </p:spPr>
+        <p:txBody>
+          <a:bodyPr wrap="square" lIns="0" tIns="0" rIns="0" bIns="0" rtlCol="0" anchor="ctr"/>
+          <a:lstStyle/>
+          <a:p>
+            <a:pPr indent="0" marL="0">
+              <a:buNone/>
+            </a:pPr>
+            <a:r>
+              <a:rPr lang="en-US" sz="1400" b="1" dirty="0">
+                <a:solidFill>
+                  <a:srgbClr val="15315E"/>
+                </a:solidFill>
+              </a:rPr>
+              <a:t>行程冲突</a:t>
+            </a:r>
             <a:endParaRPr lang="en-US" sz="1400" dirty="0"/>
           </a:p>
         </p:txBody>
       </p:sp>
       <p:sp>
         <p:nvSpPr>
-          <p:cNvPr id="14" name="scn-k-1"/>
+          <p:cNvPr id="17" name="scn-v-1"/>
           <p:cNvSpPr txBox="1"/>
           <p:nvPr/>
         </p:nvSpPr>
         <p:spPr>
           <a:xfrm>
-            <a:off x="1097280" y="4590288"/>
-            <a:ext cx="1554480" cy="502920"/>
+            <a:off x="2468880" y="4206240"/>
+            <a:ext cx="3474720" cy="475488"/>
           </a:xfrm>
           <a:prstGeom prst="rect">
             <a:avLst/>
@@ -4019,12 +4216,109 @@
               <a:buNone/>
             </a:pPr>
             <a:r>
+              <a:rPr lang="en-US" sz="1250" dirty="0">
+                <a:solidFill>
+                  <a:srgbClr val="3D4757"/>
+                </a:solidFill>
+              </a:rPr>
+              <a:t>非支付宝及支付宝黑名单订单，确认出票时走直付</a:t>
+            </a:r>
+            <a:endParaRPr lang="en-US" sz="1250" dirty="0"/>
+          </a:p>
+        </p:txBody>
+      </p:sp>
+      <p:sp>
+        <p:nvSpPr>
+          <p:cNvPr id="18" name="scn-dot-2"/>
+          <p:cNvSpPr/>
+          <p:nvPr/>
+        </p:nvSpPr>
+        <p:spPr>
+          <a:xfrm>
+            <a:off x="502920" y="4809744"/>
+            <a:ext cx="365760" cy="365760"/>
+          </a:xfrm>
+          <a:prstGeom prst="ellipse">
+            <a:avLst/>
+          </a:prstGeom>
+          <a:solidFill>
+            <a:srgbClr val="8FB8F5"/>
+          </a:solidFill>
+          <a:ln w="12700">
+            <a:solidFill>
+              <a:srgbClr val="8FB8F5"/>
+            </a:solidFill>
+            <a:prstDash val="solid"/>
+          </a:ln>
+        </p:spPr>
+      </p:sp>
+      <p:sp>
+        <p:nvSpPr>
+          <p:cNvPr id="19" name="scn-num-2"/>
+          <p:cNvSpPr txBox="1"/>
+          <p:nvPr/>
+        </p:nvSpPr>
+        <p:spPr>
+          <a:xfrm>
+            <a:off x="502920" y="4809744"/>
+            <a:ext cx="365760" cy="365760"/>
+          </a:xfrm>
+          <a:prstGeom prst="rect">
+            <a:avLst/>
+          </a:prstGeom>
+          <a:noFill/>
+          <a:ln/>
+        </p:spPr>
+        <p:txBody>
+          <a:bodyPr wrap="square" lIns="0" tIns="0" rIns="0" bIns="0" rtlCol="0" anchor="ctr"/>
+          <a:lstStyle/>
+          <a:p>
+            <a:pPr algn="ctr" indent="0" marL="0">
+              <a:buNone/>
+            </a:pPr>
+            <a:r>
+              <a:rPr lang="en-US" sz="1300" b="1" dirty="0">
+                <a:solidFill>
+                  <a:srgbClr val="FFFFFF"/>
+                </a:solidFill>
+              </a:rPr>
+              <a:t>3</a:t>
+            </a:r>
+            <a:endParaRPr lang="en-US" sz="1300" dirty="0"/>
+          </a:p>
+        </p:txBody>
+      </p:sp>
+      <p:sp>
+        <p:nvSpPr>
+          <p:cNvPr id="20" name="scn-k-2"/>
+          <p:cNvSpPr txBox="1"/>
+          <p:nvPr/>
+        </p:nvSpPr>
+        <p:spPr>
+          <a:xfrm>
+            <a:off x="1005840" y="4754880"/>
+            <a:ext cx="1463040" cy="475488"/>
+          </a:xfrm>
+          <a:prstGeom prst="rect">
+            <a:avLst/>
+          </a:prstGeom>
+          <a:noFill/>
+          <a:ln/>
+        </p:spPr>
+        <p:txBody>
+          <a:bodyPr wrap="square" lIns="0" tIns="0" rIns="0" bIns="0" rtlCol="0" anchor="ctr"/>
+          <a:lstStyle/>
+          <a:p>
+            <a:pPr indent="0" marL="0">
+              <a:buNone/>
+            </a:pPr>
+            <a:r>
               <a:rPr lang="en-US" sz="1400" b="1" dirty="0">
                 <a:solidFill>
                   <a:srgbClr val="15315E"/>
                 </a:solidFill>
               </a:rPr>
-              <a:t>行程冲突</a:t>
+              <a:t>票款不足补款</a:t>
             </a:r>
             <a:endParaRPr lang="en-US" sz="1400" dirty="0"/>
           </a:p>
@@ -4032,14 +4326,14 @@
       </p:sp>
       <p:sp>
         <p:nvSpPr>
-          <p:cNvPr id="15" name="scn-v-1"/>
+          <p:cNvPr id="21" name="scn-v-2"/>
           <p:cNvSpPr txBox="1"/>
           <p:nvPr/>
         </p:nvSpPr>
         <p:spPr>
           <a:xfrm>
-            <a:off x="2651760" y="4590288"/>
-            <a:ext cx="3291840" cy="502920"/>
+            <a:off x="2468880" y="4754880"/>
+            <a:ext cx="3474720" cy="475488"/>
           </a:xfrm>
           <a:prstGeom prst="rect">
             <a:avLst/>
@@ -4060,7 +4354,7 @@
                   <a:srgbClr val="3D4757"/>
                 </a:solidFill>
               </a:rPr>
-              <a:t>非支付宝及支付宝黑名单订单，确认出票时走直付</a:t>
+              <a:t>非支付宝及支付宝黑名单订单，补款时走直付</a:t>
             </a:r>
             <a:endParaRPr lang="en-US" sz="1250" dirty="0"/>
           </a:p>
@@ -4068,17 +4362,19 @@
       </p:sp>
       <p:sp>
         <p:nvSpPr>
-          <p:cNvPr id="16" name="scn-dot-2"/>
+          <p:cNvPr id="22" name="ef-chip"/>
           <p:cNvSpPr/>
           <p:nvPr/>
         </p:nvSpPr>
         <p:spPr>
           <a:xfrm>
-            <a:off x="502920" y="5294376"/>
-            <a:ext cx="411480" cy="411480"/>
-          </a:xfrm>
-          <a:prstGeom prst="ellipse">
-            <a:avLst/>
+            <a:off x="457200" y="5440680"/>
+            <a:ext cx="713232" cy="329184"/>
+          </a:xfrm>
+          <a:prstGeom prst="roundRect">
+            <a:avLst>
+              <a:gd name="adj" fmla="val 16667"/>
+            </a:avLst>
           </a:prstGeom>
           <a:solidFill>
             <a:srgbClr val="287DFA"/>
@@ -4093,14 +4389,14 @@
       </p:sp>
       <p:sp>
         <p:nvSpPr>
-          <p:cNvPr id="17" name="scn-num-2"/>
+          <p:cNvPr id="23" name="ef-chip-t"/>
           <p:cNvSpPr txBox="1"/>
           <p:nvPr/>
         </p:nvSpPr>
         <p:spPr>
           <a:xfrm>
-            <a:off x="502920" y="5294376"/>
-            <a:ext cx="411480" cy="411480"/>
+            <a:off x="457200" y="5440680"/>
+            <a:ext cx="713232" cy="329184"/>
           </a:xfrm>
           <a:prstGeom prst="rect">
             <a:avLst/>
@@ -4116,92 +4412,67 @@
               <a:buNone/>
             </a:pPr>
             <a:r>
-              <a:rPr lang="en-US" sz="1400" b="1" dirty="0">
+              <a:rPr lang="en-US" sz="1300" b="1" dirty="0">
                 <a:solidFill>
                   <a:srgbClr val="FFFFFF"/>
                 </a:solidFill>
               </a:rPr>
-              <a:t>3</a:t>
+              <a:t>效果</a:t>
+            </a:r>
+            <a:endParaRPr lang="en-US" sz="1300" dirty="0"/>
+          </a:p>
+        </p:txBody>
+      </p:sp>
+      <p:sp>
+        <p:nvSpPr>
+          <p:cNvPr id="24" name="ef-text"/>
+          <p:cNvSpPr txBox="1"/>
+          <p:nvPr/>
+        </p:nvSpPr>
+        <p:spPr>
+          <a:xfrm>
+            <a:off x="1325880" y="5303520"/>
+            <a:ext cx="4663440" cy="640080"/>
+          </a:xfrm>
+          <a:prstGeom prst="rect">
+            <a:avLst/>
+          </a:prstGeom>
+          <a:noFill/>
+          <a:ln/>
+        </p:spPr>
+        <p:txBody>
+          <a:bodyPr wrap="square" lIns="0" tIns="0" rIns="0" bIns="0" rtlCol="0" anchor="ctr"/>
+          <a:lstStyle/>
+          <a:p>
+            <a:pPr indent="0" marL="0">
+              <a:buNone/>
+            </a:pPr>
+            <a:r>
+              <a:rPr lang="en-US" sz="1400" dirty="0">
+                <a:solidFill>
+                  <a:srgbClr val="3D4757"/>
+                </a:solidFill>
+              </a:rPr>
+              <a:t>合计年化挽回票量  </a:t>
+            </a:r>
+            <a:pPr indent="0" marL="0">
+              <a:buNone/>
+            </a:pPr>
+            <a:r>
+              <a:rPr lang="en-US" sz="2800" b="1" dirty="0">
+                <a:solidFill>
+                  <a:srgbClr val="287DFA"/>
+                </a:solidFill>
+              </a:rPr>
+              <a:t>约 11.6 万张</a:t>
             </a:r>
             <a:endParaRPr lang="en-US" sz="1400" dirty="0"/>
-          </a:p>
-        </p:txBody>
-      </p:sp>
-      <p:sp>
-        <p:nvSpPr>
-          <p:cNvPr id="18" name="scn-k-2"/>
-          <p:cNvSpPr txBox="1"/>
-          <p:nvPr/>
-        </p:nvSpPr>
-        <p:spPr>
-          <a:xfrm>
-            <a:off x="1097280" y="5248656"/>
-            <a:ext cx="1554480" cy="502920"/>
-          </a:xfrm>
-          <a:prstGeom prst="rect">
-            <a:avLst/>
-          </a:prstGeom>
-          <a:noFill/>
-          <a:ln/>
-        </p:spPr>
-        <p:txBody>
-          <a:bodyPr wrap="square" lIns="0" tIns="0" rIns="0" bIns="0" rtlCol="0" anchor="ctr"/>
-          <a:lstStyle/>
-          <a:p>
-            <a:pPr indent="0" marL="0">
-              <a:buNone/>
-            </a:pPr>
-            <a:r>
-              <a:rPr lang="en-US" sz="1400" b="1" dirty="0">
-                <a:solidFill>
-                  <a:srgbClr val="15315E"/>
-                </a:solidFill>
-              </a:rPr>
-              <a:t>票款不足补款</a:t>
-            </a:r>
-            <a:endParaRPr lang="en-US" sz="1400" dirty="0"/>
-          </a:p>
-        </p:txBody>
-      </p:sp>
-      <p:sp>
-        <p:nvSpPr>
-          <p:cNvPr id="19" name="scn-v-2"/>
-          <p:cNvSpPr txBox="1"/>
-          <p:nvPr/>
-        </p:nvSpPr>
-        <p:spPr>
-          <a:xfrm>
-            <a:off x="2651760" y="5248656"/>
-            <a:ext cx="3291840" cy="502920"/>
-          </a:xfrm>
-          <a:prstGeom prst="rect">
-            <a:avLst/>
-          </a:prstGeom>
-          <a:noFill/>
-          <a:ln/>
-        </p:spPr>
-        <p:txBody>
-          <a:bodyPr wrap="square" lIns="0" tIns="0" rIns="0" bIns="0" rtlCol="0" anchor="ctr"/>
-          <a:lstStyle/>
-          <a:p>
-            <a:pPr indent="0" marL="0">
-              <a:buNone/>
-            </a:pPr>
-            <a:r>
-              <a:rPr lang="en-US" sz="1250" dirty="0">
-                <a:solidFill>
-                  <a:srgbClr val="3D4757"/>
-                </a:solidFill>
-              </a:rPr>
-              <a:t>非支付宝及支付宝黑名单订单，补款时走直付</a:t>
-            </a:r>
-            <a:endParaRPr lang="en-US" sz="1250" dirty="0"/>
           </a:p>
         </p:txBody>
       </p:sp>
       <p:pic>
         <p:nvPicPr>
-          <p:cNvPr id="20" name="flow-shot-0" descr="智能第二程：车票待确认页，用户确认出票后走直付">    </p:cNvPr>
+          <p:cNvPr id="25" name="flow-shot-0" descr="智能第二程：车票待确认页，用户确认出票后走直付">    </p:cNvPr>
           <p:cNvPicPr>
             <a:picLocks noChangeAspect="1"/>
           </p:cNvPicPr>
@@ -4215,8 +4486,8 @@
         </p:blipFill>
         <p:spPr>
           <a:xfrm>
-            <a:off x="6309360" y="1508760"/>
-            <a:ext cx="1372756" cy="3017520"/>
+            <a:off x="6400800" y="1554480"/>
+            <a:ext cx="1788742" cy="3931920"/>
           </a:xfrm>
           <a:prstGeom prst="rect">
             <a:avLst/>
@@ -4225,14 +4496,14 @@
       </p:pic>
       <p:sp>
         <p:nvSpPr>
-          <p:cNvPr id="21" name="flow-frame-0"/>
+          <p:cNvPr id="26" name="flow-frame-0"/>
           <p:cNvSpPr/>
           <p:nvPr/>
         </p:nvSpPr>
         <p:spPr>
           <a:xfrm>
-            <a:off x="6309360" y="1508760"/>
-            <a:ext cx="1372756" cy="3017520"/>
+            <a:off x="6400800" y="1554480"/>
+            <a:ext cx="1788742" cy="3931920"/>
           </a:xfrm>
           <a:prstGeom prst="rect">
             <a:avLst/>
@@ -4252,14 +4523,14 @@
       </p:sp>
       <p:sp>
         <p:nvSpPr>
-          <p:cNvPr id="22" name="flow-cap-0"/>
+          <p:cNvPr id="27" name="flow-cap-0"/>
           <p:cNvSpPr txBox="1"/>
           <p:nvPr/>
         </p:nvSpPr>
         <p:spPr>
           <a:xfrm>
-            <a:off x="7819276" y="2377440"/>
-            <a:ext cx="1188720" cy="1280160"/>
+            <a:off x="6126480" y="5577840"/>
+            <a:ext cx="2337382" cy="640080"/>
           </a:xfrm>
           <a:prstGeom prst="rect">
             <a:avLst/>
@@ -4271,7 +4542,7 @@
           <a:bodyPr wrap="square" lIns="0" tIns="0" rIns="0" bIns="0" rtlCol="0" anchor="t"/>
           <a:lstStyle/>
           <a:p>
-            <a:pPr indent="0" marL="0">
+            <a:pPr algn="ctr" indent="0" marL="0">
               <a:buNone/>
             </a:pPr>
             <a:r>
@@ -4285,7 +4556,7 @@
             <a:endParaRPr lang="en-US" sz="1200" dirty="0"/>
           </a:p>
           <a:p>
-            <a:pPr indent="0" marL="0">
+            <a:pPr algn="ctr" indent="0" marL="0">
               <a:buNone/>
             </a:pPr>
             <a:r>
@@ -4302,7 +4573,7 @@
       </p:sp>
       <p:pic>
         <p:nvPicPr>
-          <p:cNvPr id="23" name="flow-shot-1" descr="行程冲突：提示行程冲突，用户确认出票后走直付">    </p:cNvPr>
+          <p:cNvPr id="28" name="flow-shot-1" descr="行程冲突：提示行程冲突，用户确认出票后走直付">    </p:cNvPr>
           <p:cNvPicPr>
             <a:picLocks noChangeAspect="1"/>
           </p:cNvPicPr>
@@ -4316,8 +4587,8 @@
         </p:blipFill>
         <p:spPr>
           <a:xfrm>
-            <a:off x="9052560" y="1508760"/>
-            <a:ext cx="1372756" cy="3017520"/>
+            <a:off x="9144000" y="1554480"/>
+            <a:ext cx="1788742" cy="3931920"/>
           </a:xfrm>
           <a:prstGeom prst="rect">
             <a:avLst/>
@@ -4326,14 +4597,14 @@
       </p:pic>
       <p:sp>
         <p:nvSpPr>
-          <p:cNvPr id="24" name="flow-frame-1"/>
+          <p:cNvPr id="29" name="flow-frame-1"/>
           <p:cNvSpPr/>
           <p:nvPr/>
         </p:nvSpPr>
         <p:spPr>
           <a:xfrm>
-            <a:off x="9052560" y="1508760"/>
-            <a:ext cx="1372756" cy="3017520"/>
+            <a:off x="9144000" y="1554480"/>
+            <a:ext cx="1788742" cy="3931920"/>
           </a:xfrm>
           <a:prstGeom prst="rect">
             <a:avLst/>
@@ -4353,14 +4624,14 @@
       </p:sp>
       <p:sp>
         <p:nvSpPr>
-          <p:cNvPr id="25" name="flow-cap-1"/>
+          <p:cNvPr id="30" name="flow-cap-1"/>
           <p:cNvSpPr txBox="1"/>
           <p:nvPr/>
         </p:nvSpPr>
         <p:spPr>
           <a:xfrm>
-            <a:off x="10562476" y="2377440"/>
-            <a:ext cx="1188720" cy="1280160"/>
+            <a:off x="8869680" y="5577840"/>
+            <a:ext cx="2337382" cy="640080"/>
           </a:xfrm>
           <a:prstGeom prst="rect">
             <a:avLst/>
@@ -4372,7 +4643,7 @@
           <a:bodyPr wrap="square" lIns="0" tIns="0" rIns="0" bIns="0" rtlCol="0" anchor="t"/>
           <a:lstStyle/>
           <a:p>
-            <a:pPr indent="0" marL="0">
+            <a:pPr algn="ctr" indent="0" marL="0">
               <a:buNone/>
             </a:pPr>
             <a:r>
@@ -4386,7 +4657,7 @@
             <a:endParaRPr lang="en-US" sz="1200" dirty="0"/>
           </a:p>
           <a:p>
-            <a:pPr indent="0" marL="0">
+            <a:pPr algn="ctr" indent="0" marL="0">
               <a:buNone/>
             </a:pPr>
             <a:r>
@@ -4398,141 +4669,6 @@
               <a:t>提示行程冲突，用户确认出票后走直付</a:t>
             </a:r>
             <a:endParaRPr lang="en-US" sz="1200" dirty="0"/>
-          </a:p>
-        </p:txBody>
-      </p:sp>
-      <p:sp>
-        <p:nvSpPr>
-          <p:cNvPr id="26" name="res-card"/>
-          <p:cNvSpPr/>
-          <p:nvPr/>
-        </p:nvSpPr>
-        <p:spPr>
-          <a:xfrm>
-            <a:off x="6245352" y="4709160"/>
-            <a:ext cx="5486400" cy="1508760"/>
-          </a:xfrm>
-          <a:prstGeom prst="roundRect">
-            <a:avLst>
-              <a:gd name="adj" fmla="val 4848"/>
-            </a:avLst>
-          </a:prstGeom>
-          <a:solidFill>
-            <a:srgbClr val="EEF4FF"/>
-          </a:solidFill>
-          <a:ln w="12700">
-            <a:solidFill>
-              <a:srgbClr val="EEF4FF"/>
-            </a:solidFill>
-            <a:prstDash val="solid"/>
-          </a:ln>
-        </p:spPr>
-      </p:sp>
-      <p:sp>
-        <p:nvSpPr>
-          <p:cNvPr id="27" name="res-h"/>
-          <p:cNvSpPr txBox="1"/>
-          <p:nvPr/>
-        </p:nvSpPr>
-        <p:spPr>
-          <a:xfrm>
-            <a:off x="6492240" y="4846320"/>
-            <a:ext cx="1828800" cy="274320"/>
-          </a:xfrm>
-          <a:prstGeom prst="rect">
-            <a:avLst/>
-          </a:prstGeom>
-          <a:noFill/>
-          <a:ln/>
-        </p:spPr>
-        <p:txBody>
-          <a:bodyPr wrap="square" lIns="0" tIns="0" rIns="0" bIns="0" rtlCol="0" anchor="t"/>
-          <a:lstStyle/>
-          <a:p>
-            <a:pPr indent="0" marL="0">
-              <a:buNone/>
-            </a:pPr>
-            <a:r>
-              <a:rPr lang="en-US" sz="1400" b="1" dirty="0">
-                <a:solidFill>
-                  <a:srgbClr val="287DFA"/>
-                </a:solidFill>
-              </a:rPr>
-              <a:t>效果</a:t>
-            </a:r>
-            <a:endParaRPr lang="en-US" sz="1400" dirty="0"/>
-          </a:p>
-        </p:txBody>
-      </p:sp>
-      <p:sp>
-        <p:nvSpPr>
-          <p:cNvPr id="28" name="res-label"/>
-          <p:cNvSpPr txBox="1"/>
-          <p:nvPr/>
-        </p:nvSpPr>
-        <p:spPr>
-          <a:xfrm>
-            <a:off x="6492240" y="5212080"/>
-            <a:ext cx="2377440" cy="320040"/>
-          </a:xfrm>
-          <a:prstGeom prst="rect">
-            <a:avLst/>
-          </a:prstGeom>
-          <a:noFill/>
-          <a:ln/>
-        </p:spPr>
-        <p:txBody>
-          <a:bodyPr wrap="square" lIns="0" tIns="0" rIns="0" bIns="0" rtlCol="0" anchor="t"/>
-          <a:lstStyle/>
-          <a:p>
-            <a:pPr indent="0" marL="0">
-              <a:buNone/>
-            </a:pPr>
-            <a:r>
-              <a:rPr lang="en-US" sz="1300" dirty="0">
-                <a:solidFill>
-                  <a:srgbClr val="3D4757"/>
-                </a:solidFill>
-              </a:rPr>
-              <a:t>合计年化挽回票量</a:t>
-            </a:r>
-            <a:endParaRPr lang="en-US" sz="1300" dirty="0"/>
-          </a:p>
-        </p:txBody>
-      </p:sp>
-      <p:sp>
-        <p:nvSpPr>
-          <p:cNvPr id="29" name="res-value"/>
-          <p:cNvSpPr txBox="1"/>
-          <p:nvPr/>
-        </p:nvSpPr>
-        <p:spPr>
-          <a:xfrm>
-            <a:off x="6492240" y="5532120"/>
-            <a:ext cx="5029200" cy="594360"/>
-          </a:xfrm>
-          <a:prstGeom prst="rect">
-            <a:avLst/>
-          </a:prstGeom>
-          <a:noFill/>
-          <a:ln/>
-        </p:spPr>
-        <p:txBody>
-          <a:bodyPr wrap="square" lIns="0" tIns="0" rIns="0" bIns="0" rtlCol="0" anchor="t"/>
-          <a:lstStyle/>
-          <a:p>
-            <a:pPr indent="0" marL="0">
-              <a:buNone/>
-            </a:pPr>
-            <a:r>
-              <a:rPr lang="en-US" sz="3200" b="1" dirty="0">
-                <a:solidFill>
-                  <a:srgbClr val="287DFA"/>
-                </a:solidFill>
-              </a:rPr>
-              <a:t>约 11.6 万张</a:t>
-            </a:r>
-            <a:endParaRPr lang="en-US" sz="3200" dirty="0"/>
           </a:p>
         </p:txBody>
       </p:sp>
@@ -4639,171 +4775,18 @@
       </p:sp>
       <p:sp>
         <p:nvSpPr>
-          <p:cNvPr id="4" name="ba-card-0"/>
+          <p:cNvPr id="4" name="bg-chip"/>
           <p:cNvSpPr/>
           <p:nvPr/>
         </p:nvSpPr>
         <p:spPr>
           <a:xfrm>
-            <a:off x="457200" y="1600200"/>
-            <a:ext cx="5760720" cy="1051560"/>
+            <a:off x="457200" y="1554480"/>
+            <a:ext cx="713232" cy="329184"/>
           </a:xfrm>
           <a:prstGeom prst="roundRect">
             <a:avLst>
-              <a:gd name="adj" fmla="val 6957"/>
-            </a:avLst>
-          </a:prstGeom>
-          <a:solidFill>
-            <a:srgbClr val="F3F5F8"/>
-          </a:solidFill>
-          <a:ln w="12700">
-            <a:solidFill>
-              <a:srgbClr val="F3F5F8"/>
-            </a:solidFill>
-            <a:prstDash val="solid"/>
-          </a:ln>
-        </p:spPr>
-      </p:sp>
-      <p:sp>
-        <p:nvSpPr>
-          <p:cNvPr id="5" name="ba-tag-0"/>
-          <p:cNvSpPr/>
-          <p:nvPr/>
-        </p:nvSpPr>
-        <p:spPr>
-          <a:xfrm>
-            <a:off x="685800" y="1929384"/>
-            <a:ext cx="777240" cy="384048"/>
-          </a:xfrm>
-          <a:prstGeom prst="roundRect">
-            <a:avLst>
-              <a:gd name="adj" fmla="val 14286"/>
-            </a:avLst>
-          </a:prstGeom>
-          <a:solidFill>
-            <a:srgbClr val="5B6B80"/>
-          </a:solidFill>
-          <a:ln w="12700">
-            <a:solidFill>
-              <a:srgbClr val="5B6B80"/>
-            </a:solidFill>
-            <a:prstDash val="solid"/>
-          </a:ln>
-        </p:spPr>
-      </p:sp>
-      <p:sp>
-        <p:nvSpPr>
-          <p:cNvPr id="6" name="ba-tag-t-0"/>
-          <p:cNvSpPr txBox="1"/>
-          <p:nvPr/>
-        </p:nvSpPr>
-        <p:spPr>
-          <a:xfrm>
-            <a:off x="685800" y="1929384"/>
-            <a:ext cx="777240" cy="384048"/>
-          </a:xfrm>
-          <a:prstGeom prst="rect">
-            <a:avLst/>
-          </a:prstGeom>
-          <a:noFill/>
-          <a:ln/>
-        </p:spPr>
-        <p:txBody>
-          <a:bodyPr wrap="square" lIns="0" tIns="0" rIns="0" bIns="0" rtlCol="0" anchor="ctr"/>
-          <a:lstStyle/>
-          <a:p>
-            <a:pPr algn="ctr" indent="0" marL="0">
-              <a:buNone/>
-            </a:pPr>
-            <a:r>
-              <a:rPr lang="en-US" sz="1300" b="1" dirty="0">
-                <a:solidFill>
-                  <a:srgbClr val="FFFFFF"/>
-                </a:solidFill>
-              </a:rPr>
-              <a:t>之前</a:t>
-            </a:r>
-            <a:endParaRPr lang="en-US" sz="1300" dirty="0"/>
-          </a:p>
-        </p:txBody>
-      </p:sp>
-      <p:sp>
-        <p:nvSpPr>
-          <p:cNvPr id="7" name="ba-text-0"/>
-          <p:cNvSpPr txBox="1"/>
-          <p:nvPr/>
-        </p:nvSpPr>
-        <p:spPr>
-          <a:xfrm>
-            <a:off x="1645920" y="1600200"/>
-            <a:ext cx="4434840" cy="1051560"/>
-          </a:xfrm>
-          <a:prstGeom prst="rect">
-            <a:avLst/>
-          </a:prstGeom>
-          <a:noFill/>
-          <a:ln/>
-        </p:spPr>
-        <p:txBody>
-          <a:bodyPr wrap="square" lIns="0" tIns="0" rIns="0" bIns="0" rtlCol="0" anchor="ctr"/>
-          <a:lstStyle/>
-          <a:p>
-            <a:pPr indent="0" marL="0">
-              <a:buNone/>
-            </a:pPr>
-            <a:r>
-              <a:rPr lang="en-US" sz="1350" dirty="0">
-                <a:solidFill>
-                  <a:srgbClr val="3D4757"/>
-                </a:solidFill>
-              </a:rPr>
-              <a:t>支付风控后抢转买关闭：用户改单选择有票方案时，只能通过捡漏出票</a:t>
-            </a:r>
-            <a:endParaRPr lang="en-US" sz="1350" dirty="0"/>
-          </a:p>
-        </p:txBody>
-      </p:sp>
-      <p:sp>
-        <p:nvSpPr>
-          <p:cNvPr id="8" name="ba-card-1"/>
-          <p:cNvSpPr/>
-          <p:nvPr/>
-        </p:nvSpPr>
-        <p:spPr>
-          <a:xfrm>
-            <a:off x="457200" y="2834640"/>
-            <a:ext cx="5760720" cy="1051560"/>
-          </a:xfrm>
-          <a:prstGeom prst="roundRect">
-            <a:avLst>
-              <a:gd name="adj" fmla="val 6957"/>
-            </a:avLst>
-          </a:prstGeom>
-          <a:solidFill>
-            <a:srgbClr val="EEF4FF"/>
-          </a:solidFill>
-          <a:ln w="12700">
-            <a:solidFill>
-              <a:srgbClr val="EEF4FF"/>
-            </a:solidFill>
-            <a:prstDash val="solid"/>
-          </a:ln>
-        </p:spPr>
-      </p:sp>
-      <p:sp>
-        <p:nvSpPr>
-          <p:cNvPr id="9" name="ba-tag-1"/>
-          <p:cNvSpPr/>
-          <p:nvPr/>
-        </p:nvSpPr>
-        <p:spPr>
-          <a:xfrm>
-            <a:off x="685800" y="3163824"/>
-            <a:ext cx="777240" cy="384048"/>
-          </a:xfrm>
-          <a:prstGeom prst="roundRect">
-            <a:avLst>
-              <a:gd name="adj" fmla="val 14286"/>
+              <a:gd name="adj" fmla="val 16667"/>
             </a:avLst>
           </a:prstGeom>
           <a:solidFill>
@@ -4819,14 +4802,14 @@
       </p:sp>
       <p:sp>
         <p:nvSpPr>
-          <p:cNvPr id="10" name="ba-tag-t-1"/>
+          <p:cNvPr id="5" name="bg-chip-t"/>
           <p:cNvSpPr txBox="1"/>
           <p:nvPr/>
         </p:nvSpPr>
         <p:spPr>
           <a:xfrm>
-            <a:off x="685800" y="3163824"/>
-            <a:ext cx="777240" cy="384048"/>
+            <a:off x="457200" y="1554480"/>
+            <a:ext cx="713232" cy="329184"/>
           </a:xfrm>
           <a:prstGeom prst="rect">
             <a:avLst/>
@@ -4847,7 +4830,7 @@
                   <a:srgbClr val="FFFFFF"/>
                 </a:solidFill>
               </a:rPr>
-              <a:t>之后</a:t>
+              <a:t>背景</a:t>
             </a:r>
             <a:endParaRPr lang="en-US" sz="1300" dirty="0"/>
           </a:p>
@@ -4855,14 +4838,77 @@
       </p:sp>
       <p:sp>
         <p:nvSpPr>
-          <p:cNvPr id="11" name="ba-text-1"/>
+          <p:cNvPr id="6" name="bg-text"/>
           <p:cNvSpPr txBox="1"/>
           <p:nvPr/>
         </p:nvSpPr>
         <p:spPr>
           <a:xfrm>
-            <a:off x="1645920" y="2834640"/>
-            <a:ext cx="4434840" cy="1051560"/>
+            <a:off x="457200" y="1965960"/>
+            <a:ext cx="5760720" cy="640080"/>
+          </a:xfrm>
+          <a:prstGeom prst="rect">
+            <a:avLst/>
+          </a:prstGeom>
+          <a:noFill/>
+          <a:ln/>
+        </p:spPr>
+        <p:txBody>
+          <a:bodyPr wrap="square" lIns="0" tIns="0" rIns="0" bIns="0" rtlCol="0" anchor="t"/>
+          <a:lstStyle/>
+          <a:p>
+            <a:pPr indent="0" marL="0">
+              <a:buNone/>
+            </a:pPr>
+            <a:r>
+              <a:rPr lang="en-US" sz="1300" dirty="0">
+                <a:solidFill>
+                  <a:srgbClr val="3D4757"/>
+                </a:solidFill>
+              </a:rPr>
+              <a:t>支付风控后抢转买关闭，用户改单选择有票方案时只能通过捡漏出票，平峰期成功率约 54.9%</a:t>
+            </a:r>
+            <a:endParaRPr lang="en-US" sz="1300" dirty="0"/>
+          </a:p>
+        </p:txBody>
+      </p:sp>
+      <p:sp>
+        <p:nvSpPr>
+          <p:cNvPr id="7" name="st-chip"/>
+          <p:cNvSpPr/>
+          <p:nvPr/>
+        </p:nvSpPr>
+        <p:spPr>
+          <a:xfrm>
+            <a:off x="457200" y="2788920"/>
+            <a:ext cx="713232" cy="329184"/>
+          </a:xfrm>
+          <a:prstGeom prst="roundRect">
+            <a:avLst>
+              <a:gd name="adj" fmla="val 16667"/>
+            </a:avLst>
+          </a:prstGeom>
+          <a:solidFill>
+            <a:srgbClr val="287DFA"/>
+          </a:solidFill>
+          <a:ln w="12700">
+            <a:solidFill>
+              <a:srgbClr val="287DFA"/>
+            </a:solidFill>
+            <a:prstDash val="solid"/>
+          </a:ln>
+        </p:spPr>
+      </p:sp>
+      <p:sp>
+        <p:nvSpPr>
+          <p:cNvPr id="8" name="st-chip-t"/>
+          <p:cNvSpPr txBox="1"/>
+          <p:nvPr/>
+        </p:nvSpPr>
+        <p:spPr>
+          <a:xfrm>
+            <a:off x="457200" y="2788920"/>
+            <a:ext cx="713232" cy="329184"/>
           </a:xfrm>
           <a:prstGeom prst="rect">
             <a:avLst/>
@@ -4874,24 +4920,60 @@
           <a:bodyPr wrap="square" lIns="0" tIns="0" rIns="0" bIns="0" rtlCol="0" anchor="ctr"/>
           <a:lstStyle/>
           <a:p>
+            <a:pPr algn="ctr" indent="0" marL="0">
+              <a:buNone/>
+            </a:pPr>
+            <a:r>
+              <a:rPr lang="en-US" sz="1300" b="1" dirty="0">
+                <a:solidFill>
+                  <a:srgbClr val="FFFFFF"/>
+                </a:solidFill>
+              </a:rPr>
+              <a:t>策略</a:t>
+            </a:r>
+            <a:endParaRPr lang="en-US" sz="1300" dirty="0"/>
+          </a:p>
+        </p:txBody>
+      </p:sp>
+      <p:sp>
+        <p:nvSpPr>
+          <p:cNvPr id="9" name="st-text"/>
+          <p:cNvSpPr txBox="1"/>
+          <p:nvPr/>
+        </p:nvSpPr>
+        <p:spPr>
+          <a:xfrm>
+            <a:off x="457200" y="3200400"/>
+            <a:ext cx="5760720" cy="640080"/>
+          </a:xfrm>
+          <a:prstGeom prst="rect">
+            <a:avLst/>
+          </a:prstGeom>
+          <a:noFill/>
+          <a:ln/>
+        </p:spPr>
+        <p:txBody>
+          <a:bodyPr wrap="square" lIns="0" tIns="0" rIns="0" bIns="0" rtlCol="0" anchor="t"/>
+          <a:lstStyle/>
+          <a:p>
             <a:pPr indent="0" marL="0">
               <a:buNone/>
             </a:pPr>
             <a:r>
-              <a:rPr lang="en-US" sz="1350" dirty="0">
+              <a:rPr lang="en-US" sz="1300" dirty="0">
                 <a:solidFill>
                   <a:srgbClr val="3D4757"/>
                 </a:solidFill>
               </a:rPr>
-              <a:t>8 月放开支付宝（非黑名单）订单在该场景下的抢转买，可走买票通道出票</a:t>
-            </a:r>
-            <a:endParaRPr lang="en-US" sz="1350" dirty="0"/>
+              <a:t>8 月放开支付宝（非黑名单）订单在该场景下的抢转买，选择有票方案后可走买票通道出票</a:t>
+            </a:r>
+            <a:endParaRPr lang="en-US" sz="1300" dirty="0"/>
           </a:p>
         </p:txBody>
       </p:sp>
       <p:pic>
         <p:nvPicPr>
-          <p:cNvPr id="12" name="ba-shot" descr="订单详情页添加方案：有票方案入口">    </p:cNvPr>
+          <p:cNvPr id="10" name="ba-shot" descr="订单详情页添加方案：有票方案入口">    </p:cNvPr>
           <p:cNvPicPr>
             <a:picLocks noChangeAspect="1"/>
           </p:cNvPicPr>
@@ -4905,8 +4987,8 @@
         </p:blipFill>
         <p:spPr>
           <a:xfrm>
-            <a:off x="457200" y="4114800"/>
-            <a:ext cx="2675347" cy="2103120"/>
+            <a:off x="457200" y="3977640"/>
+            <a:ext cx="2849826" cy="2240280"/>
           </a:xfrm>
           <a:prstGeom prst="rect">
             <a:avLst/>
@@ -4915,14 +4997,14 @@
       </p:pic>
       <p:sp>
         <p:nvSpPr>
-          <p:cNvPr id="13" name="ba-frame"/>
+          <p:cNvPr id="11" name="ba-frame"/>
           <p:cNvSpPr/>
           <p:nvPr/>
         </p:nvSpPr>
         <p:spPr>
           <a:xfrm>
-            <a:off x="457200" y="4114800"/>
-            <a:ext cx="2675347" cy="2103120"/>
+            <a:off x="457200" y="3977640"/>
+            <a:ext cx="2849826" cy="2240280"/>
           </a:xfrm>
           <a:prstGeom prst="rect">
             <a:avLst/>
@@ -4942,14 +5024,14 @@
       </p:sp>
       <p:sp>
         <p:nvSpPr>
-          <p:cNvPr id="14" name="ba-cap"/>
+          <p:cNvPr id="12" name="ba-cap"/>
           <p:cNvSpPr txBox="1"/>
           <p:nvPr/>
         </p:nvSpPr>
         <p:spPr>
           <a:xfrm>
-            <a:off x="3337560" y="4480560"/>
-            <a:ext cx="2834640" cy="1371600"/>
+            <a:off x="3535626" y="4389120"/>
+            <a:ext cx="2682294" cy="1097280"/>
           </a:xfrm>
           <a:prstGeom prst="rect">
             <a:avLst/>
@@ -4984,7 +5066,7 @@
                   <a:srgbClr val="3D4757"/>
                 </a:solidFill>
               </a:rPr>
-              <a:t>选择有票方案可立即出票；支付宝（非黑名单）订单走抢转买出票</a:t>
+              <a:t>「有票方案」入口：选择后可立即出票</a:t>
             </a:r>
             <a:endParaRPr lang="en-US" sz="1250" dirty="0"/>
           </a:p>
@@ -4992,49 +5074,76 @@
       </p:sp>
       <p:sp>
         <p:nvSpPr>
-          <p:cNvPr id="15" name="res-head"/>
+          <p:cNvPr id="13" name="ef-chip"/>
+          <p:cNvSpPr/>
+          <p:nvPr/>
+        </p:nvSpPr>
+        <p:spPr>
+          <a:xfrm>
+            <a:off x="6583680" y="1554480"/>
+            <a:ext cx="713232" cy="329184"/>
+          </a:xfrm>
+          <a:prstGeom prst="roundRect">
+            <a:avLst>
+              <a:gd name="adj" fmla="val 16667"/>
+            </a:avLst>
+          </a:prstGeom>
+          <a:solidFill>
+            <a:srgbClr val="287DFA"/>
+          </a:solidFill>
+          <a:ln w="12700">
+            <a:solidFill>
+              <a:srgbClr val="287DFA"/>
+            </a:solidFill>
+            <a:prstDash val="solid"/>
+          </a:ln>
+        </p:spPr>
+      </p:sp>
+      <p:sp>
+        <p:nvSpPr>
+          <p:cNvPr id="14" name="ef-chip-t"/>
           <p:cNvSpPr txBox="1"/>
           <p:nvPr/>
         </p:nvSpPr>
         <p:spPr>
           <a:xfrm>
-            <a:off x="6583680" y="1600200"/>
-            <a:ext cx="2743200" cy="320040"/>
-          </a:xfrm>
-          <a:prstGeom prst="rect">
-            <a:avLst/>
-          </a:prstGeom>
-          <a:noFill/>
-          <a:ln/>
-        </p:spPr>
-        <p:txBody>
-          <a:bodyPr wrap="square" lIns="0" tIns="0" rIns="0" bIns="0" rtlCol="0" anchor="t"/>
-          <a:lstStyle/>
-          <a:p>
-            <a:pPr indent="0" marL="0">
-              <a:buNone/>
-            </a:pPr>
-            <a:r>
-              <a:rPr lang="en-US" sz="1600" b="1" dirty="0">
-                <a:solidFill>
-                  <a:srgbClr val="287DFA"/>
+            <a:off x="6583680" y="1554480"/>
+            <a:ext cx="713232" cy="329184"/>
+          </a:xfrm>
+          <a:prstGeom prst="rect">
+            <a:avLst/>
+          </a:prstGeom>
+          <a:noFill/>
+          <a:ln/>
+        </p:spPr>
+        <p:txBody>
+          <a:bodyPr wrap="square" lIns="0" tIns="0" rIns="0" bIns="0" rtlCol="0" anchor="ctr"/>
+          <a:lstStyle/>
+          <a:p>
+            <a:pPr algn="ctr" indent="0" marL="0">
+              <a:buNone/>
+            </a:pPr>
+            <a:r>
+              <a:rPr lang="en-US" sz="1300" b="1" dirty="0">
+                <a:solidFill>
+                  <a:srgbClr val="FFFFFF"/>
                 </a:solidFill>
               </a:rPr>
               <a:t>效果</a:t>
             </a:r>
-            <a:endParaRPr lang="en-US" sz="1600" dirty="0"/>
-          </a:p>
-        </p:txBody>
-      </p:sp>
-      <p:sp>
-        <p:nvSpPr>
-          <p:cNvPr id="16" name="chart-cap"/>
+            <a:endParaRPr lang="en-US" sz="1300" dirty="0"/>
+          </a:p>
+        </p:txBody>
+      </p:sp>
+      <p:sp>
+        <p:nvSpPr>
+          <p:cNvPr id="15" name="chart-cap"/>
           <p:cNvSpPr txBox="1"/>
           <p:nvPr/>
         </p:nvSpPr>
         <p:spPr>
           <a:xfrm>
-            <a:off x="6583680" y="1965960"/>
+            <a:off x="6583680" y="2011680"/>
             <a:ext cx="2743200" cy="274320"/>
           </a:xfrm>
           <a:prstGeom prst="rect">
@@ -5064,12 +5173,12 @@
       </p:sp>
       <p:graphicFrame>
         <p:nvGraphicFramePr>
-          <p:cNvPr id="17" name="sr-chart" descr=""/>
+          <p:cNvPr id="16" name="sr-chart" descr=""/>
           <p:cNvGraphicFramePr/>
           <p:nvPr/>
         </p:nvGraphicFramePr>
         <p:xfrm>
-          <a:off x="6492240" y="2240280"/>
+          <a:off x="6492240" y="2286000"/>
           <a:ext cx="3108960" cy="3931920"/>
         </p:xfrm>
         <a:graphic xmlns:a="http://schemas.openxmlformats.org/drawingml/2006/main">
@@ -5080,13 +5189,13 @@
       </p:graphicFrame>
       <p:sp>
         <p:nvSpPr>
-          <p:cNvPr id="18" name="k1-card"/>
+          <p:cNvPr id="17" name="k1-card"/>
           <p:cNvSpPr/>
           <p:nvPr/>
         </p:nvSpPr>
         <p:spPr>
           <a:xfrm>
-            <a:off x="9829800" y="2240280"/>
+            <a:off x="9829800" y="2286000"/>
             <a:ext cx="1901952" cy="1828800"/>
           </a:xfrm>
           <a:prstGeom prst="roundRect">
@@ -5107,13 +5216,13 @@
       </p:sp>
       <p:sp>
         <p:nvSpPr>
-          <p:cNvPr id="19" name="k1-l"/>
+          <p:cNvPr id="18" name="k1-l"/>
           <p:cNvSpPr txBox="1"/>
           <p:nvPr/>
         </p:nvSpPr>
         <p:spPr>
           <a:xfrm>
-            <a:off x="9966960" y="2377440"/>
+            <a:off x="9966960" y="2423160"/>
             <a:ext cx="1691640" cy="274320"/>
           </a:xfrm>
           <a:prstGeom prst="rect">
@@ -5143,13 +5252,13 @@
       </p:sp>
       <p:sp>
         <p:nvSpPr>
-          <p:cNvPr id="20" name="k1-v"/>
+          <p:cNvPr id="19" name="k1-v"/>
           <p:cNvSpPr txBox="1"/>
           <p:nvPr/>
         </p:nvSpPr>
         <p:spPr>
           <a:xfrm>
-            <a:off x="9966960" y="2743200"/>
+            <a:off x="9966960" y="2788920"/>
             <a:ext cx="1691640" cy="548640"/>
           </a:xfrm>
           <a:prstGeom prst="rect">
@@ -5179,13 +5288,13 @@
       </p:sp>
       <p:sp>
         <p:nvSpPr>
-          <p:cNvPr id="21" name="k1-s"/>
+          <p:cNvPr id="20" name="k1-s"/>
           <p:cNvSpPr txBox="1"/>
           <p:nvPr/>
         </p:nvSpPr>
         <p:spPr>
           <a:xfrm>
-            <a:off x="9966960" y="3383280"/>
+            <a:off x="9966960" y="3429000"/>
             <a:ext cx="1691640" cy="365760"/>
           </a:xfrm>
           <a:prstGeom prst="rect">
@@ -5215,13 +5324,13 @@
       </p:sp>
       <p:sp>
         <p:nvSpPr>
-          <p:cNvPr id="22" name="k2-card"/>
+          <p:cNvPr id="21" name="k2-card"/>
           <p:cNvSpPr/>
           <p:nvPr/>
         </p:nvSpPr>
         <p:spPr>
           <a:xfrm>
-            <a:off x="9829800" y="4343400"/>
+            <a:off x="9829800" y="4389120"/>
             <a:ext cx="1901952" cy="1828800"/>
           </a:xfrm>
           <a:prstGeom prst="roundRect">
@@ -5242,13 +5351,13 @@
       </p:sp>
       <p:sp>
         <p:nvSpPr>
-          <p:cNvPr id="23" name="k2-l"/>
+          <p:cNvPr id="22" name="k2-l"/>
           <p:cNvSpPr txBox="1"/>
           <p:nvPr/>
         </p:nvSpPr>
         <p:spPr>
           <a:xfrm>
-            <a:off x="9966960" y="4480560"/>
+            <a:off x="9966960" y="4526280"/>
             <a:ext cx="1691640" cy="274320"/>
           </a:xfrm>
           <a:prstGeom prst="rect">
@@ -5278,13 +5387,13 @@
       </p:sp>
       <p:sp>
         <p:nvSpPr>
-          <p:cNvPr id="24" name="k2-v"/>
+          <p:cNvPr id="23" name="k2-v"/>
           <p:cNvSpPr txBox="1"/>
           <p:nvPr/>
         </p:nvSpPr>
         <p:spPr>
           <a:xfrm>
-            <a:off x="9966960" y="4846320"/>
+            <a:off x="9966960" y="4892040"/>
             <a:ext cx="1691640" cy="548640"/>
           </a:xfrm>
           <a:prstGeom prst="rect">
